--- a/public/lessons/year-6-maths/summer/week-28/interpret-pie-charts/teaching-powerpoint-v1.pptx
+++ b/public/lessons/year-6-maths/summer/week-28/interpret-pie-charts/teaching-powerpoint-v1.pptx
@@ -2,24 +2,24 @@
 <file path=ppt/presentation.xml><?xml version="1.0" encoding="utf-8"?>
 <p:presentation xmlns:p="http://schemas.openxmlformats.org/presentationml/2006/main">
   <p:sldMasterIdLst>
-    <p:sldMasterId xmlns:r="http://schemas.openxmlformats.org/officeDocument/2006/relationships" id="2147483648" r:id="R972d665dc90c4d2c"/>
+    <p:sldMasterId xmlns:r="http://schemas.openxmlformats.org/officeDocument/2006/relationships" id="2147483648" r:id="R98c08beaadf34771"/>
   </p:sldMasterIdLst>
   <p:notesMasterIdLst>
-    <p:notesMasterId xmlns:r="http://schemas.openxmlformats.org/officeDocument/2006/relationships" r:id="R7221b5222bd14f21"/>
+    <p:notesMasterId xmlns:r="http://schemas.openxmlformats.org/officeDocument/2006/relationships" r:id="Rc74e77dd27974885"/>
   </p:notesMasterIdLst>
   <p:sldIdLst>
-    <p:sldId xmlns:r="http://schemas.openxmlformats.org/officeDocument/2006/relationships" id="256" r:id="R5a77fdad8a774a73"/>
-    <p:sldId xmlns:r="http://schemas.openxmlformats.org/officeDocument/2006/relationships" id="257" r:id="R92f54da1545f4747"/>
-    <p:sldId xmlns:r="http://schemas.openxmlformats.org/officeDocument/2006/relationships" id="258" r:id="R5454cb6a138a42fa"/>
-    <p:sldId xmlns:r="http://schemas.openxmlformats.org/officeDocument/2006/relationships" id="259" r:id="Rd5775ded398642ea"/>
-    <p:sldId xmlns:r="http://schemas.openxmlformats.org/officeDocument/2006/relationships" id="260" r:id="R8e0972aee4964a4b"/>
-    <p:sldId xmlns:r="http://schemas.openxmlformats.org/officeDocument/2006/relationships" id="261" r:id="R2315a2937347413a"/>
-    <p:sldId xmlns:r="http://schemas.openxmlformats.org/officeDocument/2006/relationships" id="262" r:id="Rfbe33fce12984ded"/>
-    <p:sldId xmlns:r="http://schemas.openxmlformats.org/officeDocument/2006/relationships" id="263" r:id="R4e756f5f5f384715"/>
-    <p:sldId xmlns:r="http://schemas.openxmlformats.org/officeDocument/2006/relationships" id="264" r:id="R90b3ecc0def5461a"/>
-    <p:sldId xmlns:r="http://schemas.openxmlformats.org/officeDocument/2006/relationships" id="265" r:id="Rcdbf26f2a4a54742"/>
-    <p:sldId xmlns:r="http://schemas.openxmlformats.org/officeDocument/2006/relationships" id="266" r:id="Rc31f6fffe3814f99"/>
-    <p:sldId xmlns:r="http://schemas.openxmlformats.org/officeDocument/2006/relationships" id="267" r:id="R486aecb3c5f64007"/>
+    <p:sldId xmlns:r="http://schemas.openxmlformats.org/officeDocument/2006/relationships" id="256" r:id="R5c2309c447c84a6c"/>
+    <p:sldId xmlns:r="http://schemas.openxmlformats.org/officeDocument/2006/relationships" id="257" r:id="R03fbbbe5d5074018"/>
+    <p:sldId xmlns:r="http://schemas.openxmlformats.org/officeDocument/2006/relationships" id="258" r:id="R7ebd92a1956e4b80"/>
+    <p:sldId xmlns:r="http://schemas.openxmlformats.org/officeDocument/2006/relationships" id="259" r:id="R95588daa195d4beb"/>
+    <p:sldId xmlns:r="http://schemas.openxmlformats.org/officeDocument/2006/relationships" id="260" r:id="Rfc18890b658f493f"/>
+    <p:sldId xmlns:r="http://schemas.openxmlformats.org/officeDocument/2006/relationships" id="261" r:id="Rb82c99e59d5a43a1"/>
+    <p:sldId xmlns:r="http://schemas.openxmlformats.org/officeDocument/2006/relationships" id="262" r:id="R282f0c1ef6ca4087"/>
+    <p:sldId xmlns:r="http://schemas.openxmlformats.org/officeDocument/2006/relationships" id="263" r:id="Rd22d8c577cea48df"/>
+    <p:sldId xmlns:r="http://schemas.openxmlformats.org/officeDocument/2006/relationships" id="264" r:id="Ra69d73bd508c495d"/>
+    <p:sldId xmlns:r="http://schemas.openxmlformats.org/officeDocument/2006/relationships" id="265" r:id="R89f2dca1f3ef4b5a"/>
+    <p:sldId xmlns:r="http://schemas.openxmlformats.org/officeDocument/2006/relationships" id="266" r:id="R9c28eb1ba79d431c"/>
+    <p:sldId xmlns:r="http://schemas.openxmlformats.org/officeDocument/2006/relationships" id="267" r:id="R1553865f5ef94686"/>
   </p:sldIdLst>
   <p:sldSz cx="12192000" cy="6858000"/>
   <p:notesSz cx="6858000" cy="9144000"/>
@@ -873,7 +873,7 @@
           <a:lstStyle xmlns:a="http://schemas.openxmlformats.org/drawingml/2006/main"/>
           <a:p xmlns:a="http://schemas.openxmlformats.org/drawingml/2006/main">
             <a:r>
-              <a:t>I do. Reveal the question, setup and each calculation stage one click at a time. Pupils watch before copying. Model answer: 60 pupils.</a:t>
+              <a:t>I do. Reveal the question, then reveal each mathematical change one click at a time. Point to the numbers and operation that changed before moving to the next line. Final answer: 60 pupils.</a:t>
             </a:r>
           </a:p>
         </p:txBody>
@@ -1291,7 +1291,7 @@
   </p:cSld>
   <p:clrMap bg1="lt1" tx1="dk1" bg2="lt2" tx2="dk2" accent1="accent1" accent2="accent2" accent3="accent3" accent4="accent4" accent5="accent5" accent6="accent6" hlink="hlink" folHlink="folHlink"/>
   <p:sldLayoutIdLst>
-    <p:sldLayoutId xmlns:r="http://schemas.openxmlformats.org/officeDocument/2006/relationships" id="2147483649" r:id="R84293f0195744f73"/>
+    <p:sldLayoutId xmlns:r="http://schemas.openxmlformats.org/officeDocument/2006/relationships" id="2147483649" r:id="R9e871270f5da4223"/>
   </p:sldLayoutIdLst>
   <p:txStyles>
     <p:titleStyle>
@@ -1842,7 +1842,7 @@
           <p:cNvPr id="12" name="">
             <a:extLst xmlns:a="http://schemas.openxmlformats.org/drawingml/2006/main">
               <a:ext uri="{FF2B5EF4-FFF2-40B4-BE49-F238E27FC236}">
-                <a16:creationId xmlns:a16="http://schemas.microsoft.com/office/drawing/2014/main" id="{16236CF6-4209-4821-BD61-CFEFAEC060C9}"/>
+                <a16:creationId xmlns:a16="http://schemas.microsoft.com/office/drawing/2014/main" id="{05FD745C-788E-4023-BBB9-DBDFAB3F48C5}"/>
               </a:ext>
             </a:extLst>
           </p:cNvPr>
@@ -1874,7 +1874,7 @@
           <p:cNvPr id="2" name="">
             <a:extLst xmlns:a="http://schemas.openxmlformats.org/drawingml/2006/main">
               <a:ext uri="{FF2B5EF4-FFF2-40B4-BE49-F238E27FC236}">
-                <a16:creationId xmlns:a16="http://schemas.microsoft.com/office/drawing/2014/main" id="{D81C2250-14B8-436A-B387-26F35F7CAE29}"/>
+                <a16:creationId xmlns:a16="http://schemas.microsoft.com/office/drawing/2014/main" id="{F3FFF164-0294-4819-8178-CE786A949666}"/>
               </a:ext>
             </a:extLst>
           </p:cNvPr>
@@ -1931,7 +1931,7 @@
           <p:cNvPr id="3" name="">
             <a:extLst xmlns:a="http://schemas.openxmlformats.org/drawingml/2006/main">
               <a:ext uri="{FF2B5EF4-FFF2-40B4-BE49-F238E27FC236}">
-                <a16:creationId xmlns:a16="http://schemas.microsoft.com/office/drawing/2014/main" id="{55DF774F-EDB3-4C58-B142-60D2A73BEE0D}"/>
+                <a16:creationId xmlns:a16="http://schemas.microsoft.com/office/drawing/2014/main" id="{4E372F38-7E15-4ACD-BF80-A85A331F68B0}"/>
               </a:ext>
             </a:extLst>
           </p:cNvPr>
@@ -1965,7 +1965,7 @@
           <p:cNvPr id="4" name="">
             <a:extLst xmlns:a="http://schemas.openxmlformats.org/drawingml/2006/main">
               <a:ext uri="{FF2B5EF4-FFF2-40B4-BE49-F238E27FC236}">
-                <a16:creationId xmlns:a16="http://schemas.microsoft.com/office/drawing/2014/main" id="{9F73752F-2ED6-4B4E-A87F-A77FF09B246A}"/>
+                <a16:creationId xmlns:a16="http://schemas.microsoft.com/office/drawing/2014/main" id="{3486AFB4-7918-4B5C-B1B9-F5683793347D}"/>
               </a:ext>
             </a:extLst>
           </p:cNvPr>
@@ -2022,7 +2022,7 @@
           <p:cNvPr id="5" name="">
             <a:extLst xmlns:a="http://schemas.openxmlformats.org/drawingml/2006/main">
               <a:ext uri="{FF2B5EF4-FFF2-40B4-BE49-F238E27FC236}">
-                <a16:creationId xmlns:a16="http://schemas.microsoft.com/office/drawing/2014/main" id="{1564F560-4E60-4E60-901C-ED2A3AAD3BE6}"/>
+                <a16:creationId xmlns:a16="http://schemas.microsoft.com/office/drawing/2014/main" id="{57792746-77E4-4E18-9C9E-970C6CABD6FD}"/>
               </a:ext>
             </a:extLst>
           </p:cNvPr>
@@ -2079,7 +2079,7 @@
           <p:cNvPr id="6" name="">
             <a:extLst xmlns:a="http://schemas.openxmlformats.org/drawingml/2006/main">
               <a:ext uri="{FF2B5EF4-FFF2-40B4-BE49-F238E27FC236}">
-                <a16:creationId xmlns:a16="http://schemas.microsoft.com/office/drawing/2014/main" id="{A5F090E2-2C25-47C6-9F6B-F87CF7C21FF1}"/>
+                <a16:creationId xmlns:a16="http://schemas.microsoft.com/office/drawing/2014/main" id="{F5BAA4E8-D635-4052-817E-182978D80AD0}"/>
               </a:ext>
             </a:extLst>
           </p:cNvPr>
@@ -2113,7 +2113,7 @@
           <p:cNvPr id="7" name="">
             <a:extLst xmlns:a="http://schemas.openxmlformats.org/drawingml/2006/main">
               <a:ext uri="{FF2B5EF4-FFF2-40B4-BE49-F238E27FC236}">
-                <a16:creationId xmlns:a16="http://schemas.microsoft.com/office/drawing/2014/main" id="{76834EC5-14AA-4318-9144-A136D3872FD8}"/>
+                <a16:creationId xmlns:a16="http://schemas.microsoft.com/office/drawing/2014/main" id="{280758CF-5C5C-4222-BE1E-8BD5CEB524E9}"/>
               </a:ext>
             </a:extLst>
           </p:cNvPr>
@@ -2170,7 +2170,7 @@
           <p:cNvPr id="8" name="">
             <a:extLst xmlns:a="http://schemas.openxmlformats.org/drawingml/2006/main">
               <a:ext uri="{FF2B5EF4-FFF2-40B4-BE49-F238E27FC236}">
-                <a16:creationId xmlns:a16="http://schemas.microsoft.com/office/drawing/2014/main" id="{F96BCD32-C5EF-4D8C-BAF4-B95E1550C1AF}"/>
+                <a16:creationId xmlns:a16="http://schemas.microsoft.com/office/drawing/2014/main" id="{3F502FCC-650F-48B5-B4CE-A1EDAFCD8A02}"/>
               </a:ext>
             </a:extLst>
           </p:cNvPr>
@@ -2227,7 +2227,7 @@
           <p:cNvPr id="9" name="">
             <a:extLst xmlns:a="http://schemas.openxmlformats.org/drawingml/2006/main">
               <a:ext uri="{FF2B5EF4-FFF2-40B4-BE49-F238E27FC236}">
-                <a16:creationId xmlns:a16="http://schemas.microsoft.com/office/drawing/2014/main" id="{FDC10026-241D-4953-9533-EED1EC1C6169}"/>
+                <a16:creationId xmlns:a16="http://schemas.microsoft.com/office/drawing/2014/main" id="{613104B1-2B4F-4192-B575-D95CD05D0287}"/>
               </a:ext>
             </a:extLst>
           </p:cNvPr>
@@ -2284,7 +2284,7 @@
           <p:cNvPr id="10" name="">
             <a:extLst xmlns:a="http://schemas.openxmlformats.org/drawingml/2006/main">
               <a:ext uri="{FF2B5EF4-FFF2-40B4-BE49-F238E27FC236}">
-                <a16:creationId xmlns:a16="http://schemas.microsoft.com/office/drawing/2014/main" id="{3C65B58B-2862-4825-8852-03A0BC2A39CA}"/>
+                <a16:creationId xmlns:a16="http://schemas.microsoft.com/office/drawing/2014/main" id="{E1A622EC-F2CB-46AD-B078-6AD9AB0A1B8E}"/>
               </a:ext>
             </a:extLst>
           </p:cNvPr>
@@ -2341,7 +2341,7 @@
           <p:cNvPr id="11" name="">
             <a:extLst xmlns:a="http://schemas.openxmlformats.org/drawingml/2006/main">
               <a:ext uri="{FF2B5EF4-FFF2-40B4-BE49-F238E27FC236}">
-                <a16:creationId xmlns:a16="http://schemas.microsoft.com/office/drawing/2014/main" id="{F236A0BA-4760-446E-8D2E-3E033254E38C}"/>
+                <a16:creationId xmlns:a16="http://schemas.microsoft.com/office/drawing/2014/main" id="{6E8D518F-B816-4224-AA5C-3E6657467AB5}"/>
               </a:ext>
             </a:extLst>
           </p:cNvPr>
@@ -2396,7 +2396,7 @@
     </p:spTree>
     <p:extLst>
       <p:ext uri="{BB962C8B-B14F-4D97-AF65-F5344CB8AC3E}">
-        <p14:creationId xmlns:p14="http://schemas.microsoft.com/office/powerpoint/2010/main" val="201298535"/>
+        <p14:creationId xmlns:p14="http://schemas.microsoft.com/office/powerpoint/2010/main" val="1669886418"/>
       </p:ext>
     </p:extLst>
   </p:cSld>
@@ -2427,7 +2427,7 @@
           <p:cNvPr id="14" name="">
             <a:extLst xmlns:a="http://schemas.openxmlformats.org/drawingml/2006/main">
               <a:ext uri="{FF2B5EF4-FFF2-40B4-BE49-F238E27FC236}">
-                <a16:creationId xmlns:a16="http://schemas.microsoft.com/office/drawing/2014/main" id="{71D5FC12-81D7-4F41-8C68-1722E2491B59}"/>
+                <a16:creationId xmlns:a16="http://schemas.microsoft.com/office/drawing/2014/main" id="{6A7A465E-0138-4A1C-8ADE-9B86346D48F9}"/>
               </a:ext>
             </a:extLst>
           </p:cNvPr>
@@ -2459,7 +2459,7 @@
           <p:cNvPr id="2" name="">
             <a:extLst xmlns:a="http://schemas.openxmlformats.org/drawingml/2006/main">
               <a:ext uri="{FF2B5EF4-FFF2-40B4-BE49-F238E27FC236}">
-                <a16:creationId xmlns:a16="http://schemas.microsoft.com/office/drawing/2014/main" id="{DE878983-0A27-41B0-A30A-6A50B8A5FAB9}"/>
+                <a16:creationId xmlns:a16="http://schemas.microsoft.com/office/drawing/2014/main" id="{E89BE414-765F-4627-B07E-F2D513613869}"/>
               </a:ext>
             </a:extLst>
           </p:cNvPr>
@@ -2516,7 +2516,7 @@
           <p:cNvPr id="3" name="">
             <a:extLst xmlns:a="http://schemas.openxmlformats.org/drawingml/2006/main">
               <a:ext uri="{FF2B5EF4-FFF2-40B4-BE49-F238E27FC236}">
-                <a16:creationId xmlns:a16="http://schemas.microsoft.com/office/drawing/2014/main" id="{BF7AEB09-AE96-4F85-AB57-984249AD475B}"/>
+                <a16:creationId xmlns:a16="http://schemas.microsoft.com/office/drawing/2014/main" id="{D679B3F1-35D9-4245-B4FC-6A8AE54D13C3}"/>
               </a:ext>
             </a:extLst>
           </p:cNvPr>
@@ -2548,7 +2548,7 @@
           <p:cNvPr id="4" name="">
             <a:extLst xmlns:a="http://schemas.openxmlformats.org/drawingml/2006/main">
               <a:ext uri="{FF2B5EF4-FFF2-40B4-BE49-F238E27FC236}">
-                <a16:creationId xmlns:a16="http://schemas.microsoft.com/office/drawing/2014/main" id="{761A6EFB-17A0-476A-8105-4471403F6451}"/>
+                <a16:creationId xmlns:a16="http://schemas.microsoft.com/office/drawing/2014/main" id="{E98B9FCD-B225-4022-A0EE-EB6B4CEE74E5}"/>
               </a:ext>
             </a:extLst>
           </p:cNvPr>
@@ -2605,7 +2605,7 @@
           <p:cNvPr id="5" name="">
             <a:extLst xmlns:a="http://schemas.openxmlformats.org/drawingml/2006/main">
               <a:ext uri="{FF2B5EF4-FFF2-40B4-BE49-F238E27FC236}">
-                <a16:creationId xmlns:a16="http://schemas.microsoft.com/office/drawing/2014/main" id="{118AE74E-07FD-4C39-91C2-E54464510C7D}"/>
+                <a16:creationId xmlns:a16="http://schemas.microsoft.com/office/drawing/2014/main" id="{B69A35E4-B788-49A1-8B26-E1EF8E260CC9}"/>
               </a:ext>
             </a:extLst>
           </p:cNvPr>
@@ -2662,7 +2662,7 @@
           <p:cNvPr id="6" name="">
             <a:extLst xmlns:a="http://schemas.openxmlformats.org/drawingml/2006/main">
               <a:ext uri="{FF2B5EF4-FFF2-40B4-BE49-F238E27FC236}">
-                <a16:creationId xmlns:a16="http://schemas.microsoft.com/office/drawing/2014/main" id="{D07D64C1-2FDC-4DA5-B227-8AB88F7E5609}"/>
+                <a16:creationId xmlns:a16="http://schemas.microsoft.com/office/drawing/2014/main" id="{B3C98651-EBE9-4D49-AC8A-93189D8AE654}"/>
               </a:ext>
             </a:extLst>
           </p:cNvPr>
@@ -2719,7 +2719,7 @@
           <p:cNvPr id="7" name="">
             <a:extLst xmlns:a="http://schemas.openxmlformats.org/drawingml/2006/main">
               <a:ext uri="{FF2B5EF4-FFF2-40B4-BE49-F238E27FC236}">
-                <a16:creationId xmlns:a16="http://schemas.microsoft.com/office/drawing/2014/main" id="{CB06363B-854B-4EF1-9E61-84FE845EB7DC}"/>
+                <a16:creationId xmlns:a16="http://schemas.microsoft.com/office/drawing/2014/main" id="{6DC46426-D8F5-4622-B6D8-999940FDD6AD}"/>
               </a:ext>
             </a:extLst>
           </p:cNvPr>
@@ -2751,7 +2751,7 @@
           <p:cNvPr id="8" name="">
             <a:extLst xmlns:a="http://schemas.openxmlformats.org/drawingml/2006/main">
               <a:ext uri="{FF2B5EF4-FFF2-40B4-BE49-F238E27FC236}">
-                <a16:creationId xmlns:a16="http://schemas.microsoft.com/office/drawing/2014/main" id="{1E0863DF-6E55-46FA-9514-E60CEF55BFDD}"/>
+                <a16:creationId xmlns:a16="http://schemas.microsoft.com/office/drawing/2014/main" id="{29995173-93E4-43C1-8A9B-E049E57B54FB}"/>
               </a:ext>
             </a:extLst>
           </p:cNvPr>
@@ -2808,7 +2808,7 @@
           <p:cNvPr id="9" name="">
             <a:extLst xmlns:a="http://schemas.openxmlformats.org/drawingml/2006/main">
               <a:ext uri="{FF2B5EF4-FFF2-40B4-BE49-F238E27FC236}">
-                <a16:creationId xmlns:a16="http://schemas.microsoft.com/office/drawing/2014/main" id="{762D7603-AF7B-4595-ACED-1DC151E0BEA8}"/>
+                <a16:creationId xmlns:a16="http://schemas.microsoft.com/office/drawing/2014/main" id="{EAB050A1-A4EA-48C3-9E8E-51E3CCEA69A6}"/>
               </a:ext>
             </a:extLst>
           </p:cNvPr>
@@ -2865,7 +2865,7 @@
           <p:cNvPr id="10" name="">
             <a:extLst xmlns:a="http://schemas.openxmlformats.org/drawingml/2006/main">
               <a:ext uri="{FF2B5EF4-FFF2-40B4-BE49-F238E27FC236}">
-                <a16:creationId xmlns:a16="http://schemas.microsoft.com/office/drawing/2014/main" id="{61159101-26C6-424B-9222-42B96EDE8263}"/>
+                <a16:creationId xmlns:a16="http://schemas.microsoft.com/office/drawing/2014/main" id="{6443207F-4410-4228-85B1-22161FAFACC2}"/>
               </a:ext>
             </a:extLst>
           </p:cNvPr>
@@ -2922,7 +2922,7 @@
           <p:cNvPr id="11" name="">
             <a:extLst xmlns:a="http://schemas.openxmlformats.org/drawingml/2006/main">
               <a:ext uri="{FF2B5EF4-FFF2-40B4-BE49-F238E27FC236}">
-                <a16:creationId xmlns:a16="http://schemas.microsoft.com/office/drawing/2014/main" id="{CE063025-D75B-4F11-BBDE-2098E830D902}"/>
+                <a16:creationId xmlns:a16="http://schemas.microsoft.com/office/drawing/2014/main" id="{0234FAE2-3FB5-4329-BE65-E7837DE2FB80}"/>
               </a:ext>
             </a:extLst>
           </p:cNvPr>
@@ -2979,7 +2979,7 @@
           <p:cNvPr id="12" name="">
             <a:extLst xmlns:a="http://schemas.openxmlformats.org/drawingml/2006/main">
               <a:ext uri="{FF2B5EF4-FFF2-40B4-BE49-F238E27FC236}">
-                <a16:creationId xmlns:a16="http://schemas.microsoft.com/office/drawing/2014/main" id="{02CA3215-7C3B-4990-8E3B-3D412B086173}"/>
+                <a16:creationId xmlns:a16="http://schemas.microsoft.com/office/drawing/2014/main" id="{2E6FE022-A796-449A-BA7A-0C9ED212CDBD}"/>
               </a:ext>
             </a:extLst>
           </p:cNvPr>
@@ -3036,7 +3036,7 @@
           <p:cNvPr id="13" name="">
             <a:extLst xmlns:a="http://schemas.openxmlformats.org/drawingml/2006/main">
               <a:ext uri="{FF2B5EF4-FFF2-40B4-BE49-F238E27FC236}">
-                <a16:creationId xmlns:a16="http://schemas.microsoft.com/office/drawing/2014/main" id="{7BA5C35B-F077-425E-9016-FDFA731370FD}"/>
+                <a16:creationId xmlns:a16="http://schemas.microsoft.com/office/drawing/2014/main" id="{9BB04D33-67DE-4E99-9F23-BE68FAC89809}"/>
               </a:ext>
             </a:extLst>
           </p:cNvPr>
@@ -3091,7 +3091,7 @@
     </p:spTree>
     <p:extLst>
       <p:ext uri="{BB962C8B-B14F-4D97-AF65-F5344CB8AC3E}">
-        <p14:creationId xmlns:p14="http://schemas.microsoft.com/office/powerpoint/2010/main" val="2031290873"/>
+        <p14:creationId xmlns:p14="http://schemas.microsoft.com/office/powerpoint/2010/main" val="1264441710"/>
       </p:ext>
     </p:extLst>
   </p:cSld>
@@ -3292,7 +3292,7 @@
           <p:cNvPr id="19" name="">
             <a:extLst xmlns:a="http://schemas.openxmlformats.org/drawingml/2006/main">
               <a:ext uri="{FF2B5EF4-FFF2-40B4-BE49-F238E27FC236}">
-                <a16:creationId xmlns:a16="http://schemas.microsoft.com/office/drawing/2014/main" id="{87ECEDF8-635F-4013-82F1-16FEBC60DA1B}"/>
+                <a16:creationId xmlns:a16="http://schemas.microsoft.com/office/drawing/2014/main" id="{28C2F2AA-BD71-48F8-9523-41BB93E0538E}"/>
               </a:ext>
             </a:extLst>
           </p:cNvPr>
@@ -3324,7 +3324,7 @@
           <p:cNvPr id="2" name="">
             <a:extLst xmlns:a="http://schemas.openxmlformats.org/drawingml/2006/main">
               <a:ext uri="{FF2B5EF4-FFF2-40B4-BE49-F238E27FC236}">
-                <a16:creationId xmlns:a16="http://schemas.microsoft.com/office/drawing/2014/main" id="{6263E59F-2336-4A79-BC34-30DE2B017957}"/>
+                <a16:creationId xmlns:a16="http://schemas.microsoft.com/office/drawing/2014/main" id="{D3A88FC3-3551-4FBF-A3A1-DE6FBAAB11F1}"/>
               </a:ext>
             </a:extLst>
           </p:cNvPr>
@@ -3381,7 +3381,7 @@
           <p:cNvPr id="3" name="">
             <a:extLst xmlns:a="http://schemas.openxmlformats.org/drawingml/2006/main">
               <a:ext uri="{FF2B5EF4-FFF2-40B4-BE49-F238E27FC236}">
-                <a16:creationId xmlns:a16="http://schemas.microsoft.com/office/drawing/2014/main" id="{2EB2A46E-A450-4B8F-9671-F474D17AF23B}"/>
+                <a16:creationId xmlns:a16="http://schemas.microsoft.com/office/drawing/2014/main" id="{8F51F8CC-1513-4845-BFAF-74014F302748}"/>
               </a:ext>
             </a:extLst>
           </p:cNvPr>
@@ -3413,7 +3413,7 @@
           <p:cNvPr id="4" name="">
             <a:extLst xmlns:a="http://schemas.openxmlformats.org/drawingml/2006/main">
               <a:ext uri="{FF2B5EF4-FFF2-40B4-BE49-F238E27FC236}">
-                <a16:creationId xmlns:a16="http://schemas.microsoft.com/office/drawing/2014/main" id="{322A6229-F52A-442F-8EF3-C51B1E5DF060}"/>
+                <a16:creationId xmlns:a16="http://schemas.microsoft.com/office/drawing/2014/main" id="{ECDD5959-D192-45A1-B5A0-D1A65C63105D}"/>
               </a:ext>
             </a:extLst>
           </p:cNvPr>
@@ -3470,7 +3470,7 @@
           <p:cNvPr id="5" name="">
             <a:extLst xmlns:a="http://schemas.openxmlformats.org/drawingml/2006/main">
               <a:ext uri="{FF2B5EF4-FFF2-40B4-BE49-F238E27FC236}">
-                <a16:creationId xmlns:a16="http://schemas.microsoft.com/office/drawing/2014/main" id="{5C3311FA-1E47-447D-A671-376318B9F90F}"/>
+                <a16:creationId xmlns:a16="http://schemas.microsoft.com/office/drawing/2014/main" id="{782D7378-C6AE-4115-A452-EB70AD7EB085}"/>
               </a:ext>
             </a:extLst>
           </p:cNvPr>
@@ -3527,7 +3527,7 @@
           <p:cNvPr id="6" name="">
             <a:extLst xmlns:a="http://schemas.openxmlformats.org/drawingml/2006/main">
               <a:ext uri="{FF2B5EF4-FFF2-40B4-BE49-F238E27FC236}">
-                <a16:creationId xmlns:a16="http://schemas.microsoft.com/office/drawing/2014/main" id="{D06EAECD-EE2A-4B76-80C4-D677C7A7D29E}"/>
+                <a16:creationId xmlns:a16="http://schemas.microsoft.com/office/drawing/2014/main" id="{6E108D9A-183D-43EE-BC45-B4C58BC7F292}"/>
               </a:ext>
             </a:extLst>
           </p:cNvPr>
@@ -3584,7 +3584,7 @@
           <p:cNvPr id="7" name="">
             <a:extLst xmlns:a="http://schemas.openxmlformats.org/drawingml/2006/main">
               <a:ext uri="{FF2B5EF4-FFF2-40B4-BE49-F238E27FC236}">
-                <a16:creationId xmlns:a16="http://schemas.microsoft.com/office/drawing/2014/main" id="{F5724E86-72D0-4A58-8010-D29FCDC457F6}"/>
+                <a16:creationId xmlns:a16="http://schemas.microsoft.com/office/drawing/2014/main" id="{34AA921A-D22A-4745-B7F8-4DFEF81E6A51}"/>
               </a:ext>
             </a:extLst>
           </p:cNvPr>
@@ -3616,7 +3616,7 @@
           <p:cNvPr id="8" name="">
             <a:extLst xmlns:a="http://schemas.openxmlformats.org/drawingml/2006/main">
               <a:ext uri="{FF2B5EF4-FFF2-40B4-BE49-F238E27FC236}">
-                <a16:creationId xmlns:a16="http://schemas.microsoft.com/office/drawing/2014/main" id="{38073AF2-0D5A-46C8-9E1F-DB2DE1EC5AF1}"/>
+                <a16:creationId xmlns:a16="http://schemas.microsoft.com/office/drawing/2014/main" id="{5CB6A001-9D95-4450-9D73-DAB08E4207FB}"/>
               </a:ext>
             </a:extLst>
           </p:cNvPr>
@@ -3673,7 +3673,7 @@
           <p:cNvPr id="9" name="">
             <a:extLst xmlns:a="http://schemas.openxmlformats.org/drawingml/2006/main">
               <a:ext uri="{FF2B5EF4-FFF2-40B4-BE49-F238E27FC236}">
-                <a16:creationId xmlns:a16="http://schemas.microsoft.com/office/drawing/2014/main" id="{27C7E6CD-8802-4954-A8F8-065D86703DE6}"/>
+                <a16:creationId xmlns:a16="http://schemas.microsoft.com/office/drawing/2014/main" id="{D69DEBEF-221F-48FA-9C1D-A5D4C43AC86A}"/>
               </a:ext>
             </a:extLst>
           </p:cNvPr>
@@ -3730,7 +3730,7 @@
           <p:cNvPr id="10" name="">
             <a:extLst xmlns:a="http://schemas.openxmlformats.org/drawingml/2006/main">
               <a:ext uri="{FF2B5EF4-FFF2-40B4-BE49-F238E27FC236}">
-                <a16:creationId xmlns:a16="http://schemas.microsoft.com/office/drawing/2014/main" id="{F739BC79-DB6D-417A-B760-FF25FB3ED2BB}"/>
+                <a16:creationId xmlns:a16="http://schemas.microsoft.com/office/drawing/2014/main" id="{94C12E7C-F062-4F16-A86F-64E6915CEBC7}"/>
               </a:ext>
             </a:extLst>
           </p:cNvPr>
@@ -3787,7 +3787,7 @@
           <p:cNvPr id="11" name="">
             <a:extLst xmlns:a="http://schemas.openxmlformats.org/drawingml/2006/main">
               <a:ext uri="{FF2B5EF4-FFF2-40B4-BE49-F238E27FC236}">
-                <a16:creationId xmlns:a16="http://schemas.microsoft.com/office/drawing/2014/main" id="{F59484F2-4C6B-4B1E-BF83-9EED3F881677}"/>
+                <a16:creationId xmlns:a16="http://schemas.microsoft.com/office/drawing/2014/main" id="{8D3527FE-AF8A-468D-A92C-F12517C141B4}"/>
               </a:ext>
             </a:extLst>
           </p:cNvPr>
@@ -3821,7 +3821,7 @@
           <p:cNvPr id="12" name="">
             <a:extLst xmlns:a="http://schemas.openxmlformats.org/drawingml/2006/main">
               <a:ext uri="{FF2B5EF4-FFF2-40B4-BE49-F238E27FC236}">
-                <a16:creationId xmlns:a16="http://schemas.microsoft.com/office/drawing/2014/main" id="{4AD06129-EB07-4320-8094-97A859D313D6}"/>
+                <a16:creationId xmlns:a16="http://schemas.microsoft.com/office/drawing/2014/main" id="{86631D66-2139-44CA-876B-2D7A30E7A344}"/>
               </a:ext>
             </a:extLst>
           </p:cNvPr>
@@ -3878,7 +3878,7 @@
           <p:cNvPr id="13" name="">
             <a:extLst xmlns:a="http://schemas.openxmlformats.org/drawingml/2006/main">
               <a:ext uri="{FF2B5EF4-FFF2-40B4-BE49-F238E27FC236}">
-                <a16:creationId xmlns:a16="http://schemas.microsoft.com/office/drawing/2014/main" id="{C4F96199-336E-415B-9CB8-ACBF888F9188}"/>
+                <a16:creationId xmlns:a16="http://schemas.microsoft.com/office/drawing/2014/main" id="{84812BA9-CF37-4427-A87A-C8D5D6B47AF5}"/>
               </a:ext>
             </a:extLst>
           </p:cNvPr>
@@ -3935,7 +3935,7 @@
           <p:cNvPr id="14" name="">
             <a:extLst xmlns:a="http://schemas.openxmlformats.org/drawingml/2006/main">
               <a:ext uri="{FF2B5EF4-FFF2-40B4-BE49-F238E27FC236}">
-                <a16:creationId xmlns:a16="http://schemas.microsoft.com/office/drawing/2014/main" id="{A0768DF5-1F27-4C28-B36C-75B6ED3AFB31}"/>
+                <a16:creationId xmlns:a16="http://schemas.microsoft.com/office/drawing/2014/main" id="{47070E20-74FE-4DB1-BF34-C2ECE3EB0F81}"/>
               </a:ext>
             </a:extLst>
           </p:cNvPr>
@@ -3992,7 +3992,7 @@
           <p:cNvPr id="15" name="">
             <a:extLst xmlns:a="http://schemas.openxmlformats.org/drawingml/2006/main">
               <a:ext uri="{FF2B5EF4-FFF2-40B4-BE49-F238E27FC236}">
-                <a16:creationId xmlns:a16="http://schemas.microsoft.com/office/drawing/2014/main" id="{53B2BACF-4D1C-440C-8582-C693BC51A0FD}"/>
+                <a16:creationId xmlns:a16="http://schemas.microsoft.com/office/drawing/2014/main" id="{43AC8B5A-65CD-4270-A557-12CF6EDAE9C1}"/>
               </a:ext>
             </a:extLst>
           </p:cNvPr>
@@ -4026,7 +4026,7 @@
           <p:cNvPr id="16" name="">
             <a:extLst xmlns:a="http://schemas.openxmlformats.org/drawingml/2006/main">
               <a:ext uri="{FF2B5EF4-FFF2-40B4-BE49-F238E27FC236}">
-                <a16:creationId xmlns:a16="http://schemas.microsoft.com/office/drawing/2014/main" id="{3F1C5DBF-86A7-481C-B57F-7612B0CED9B8}"/>
+                <a16:creationId xmlns:a16="http://schemas.microsoft.com/office/drawing/2014/main" id="{26EB95A6-0C01-4A72-B1B2-3B32662CC989}"/>
               </a:ext>
             </a:extLst>
           </p:cNvPr>
@@ -4083,7 +4083,7 @@
           <p:cNvPr id="17" name="">
             <a:extLst xmlns:a="http://schemas.openxmlformats.org/drawingml/2006/main">
               <a:ext uri="{FF2B5EF4-FFF2-40B4-BE49-F238E27FC236}">
-                <a16:creationId xmlns:a16="http://schemas.microsoft.com/office/drawing/2014/main" id="{51A3225B-5A8E-485D-8965-33877D66DEED}"/>
+                <a16:creationId xmlns:a16="http://schemas.microsoft.com/office/drawing/2014/main" id="{3E28ADDC-E8EE-457C-B344-1B13D4490784}"/>
               </a:ext>
             </a:extLst>
           </p:cNvPr>
@@ -4140,7 +4140,7 @@
           <p:cNvPr id="18" name="">
             <a:extLst xmlns:a="http://schemas.openxmlformats.org/drawingml/2006/main">
               <a:ext uri="{FF2B5EF4-FFF2-40B4-BE49-F238E27FC236}">
-                <a16:creationId xmlns:a16="http://schemas.microsoft.com/office/drawing/2014/main" id="{274A0854-3EB1-4B68-843B-AC19F1026855}"/>
+                <a16:creationId xmlns:a16="http://schemas.microsoft.com/office/drawing/2014/main" id="{D13DE59C-DDB1-456C-942D-6A57CBEA2BAD}"/>
               </a:ext>
             </a:extLst>
           </p:cNvPr>
@@ -4195,7 +4195,7 @@
     </p:spTree>
     <p:extLst>
       <p:ext uri="{BB962C8B-B14F-4D97-AF65-F5344CB8AC3E}">
-        <p14:creationId xmlns:p14="http://schemas.microsoft.com/office/powerpoint/2010/main" val="1294249505"/>
+        <p14:creationId xmlns:p14="http://schemas.microsoft.com/office/powerpoint/2010/main" val="3464240"/>
       </p:ext>
     </p:extLst>
   </p:cSld>
@@ -4350,7 +4350,7 @@
           <p:cNvPr id="23" name="">
             <a:extLst xmlns:a="http://schemas.openxmlformats.org/drawingml/2006/main">
               <a:ext uri="{FF2B5EF4-FFF2-40B4-BE49-F238E27FC236}">
-                <a16:creationId xmlns:a16="http://schemas.microsoft.com/office/drawing/2014/main" id="{6F09BE82-4ED0-4BD0-A574-B39223B8AD01}"/>
+                <a16:creationId xmlns:a16="http://schemas.microsoft.com/office/drawing/2014/main" id="{4A6D5C9F-6821-4D74-BC85-E92C9BC9A5D6}"/>
               </a:ext>
             </a:extLst>
           </p:cNvPr>
@@ -4382,7 +4382,7 @@
           <p:cNvPr id="2" name="">
             <a:extLst xmlns:a="http://schemas.openxmlformats.org/drawingml/2006/main">
               <a:ext uri="{FF2B5EF4-FFF2-40B4-BE49-F238E27FC236}">
-                <a16:creationId xmlns:a16="http://schemas.microsoft.com/office/drawing/2014/main" id="{1C98C096-E726-44B6-A845-6A270C6E577D}"/>
+                <a16:creationId xmlns:a16="http://schemas.microsoft.com/office/drawing/2014/main" id="{C621B561-9F42-4309-B579-7683D6A918EE}"/>
               </a:ext>
             </a:extLst>
           </p:cNvPr>
@@ -4439,7 +4439,7 @@
           <p:cNvPr id="3" name="">
             <a:extLst xmlns:a="http://schemas.openxmlformats.org/drawingml/2006/main">
               <a:ext uri="{FF2B5EF4-FFF2-40B4-BE49-F238E27FC236}">
-                <a16:creationId xmlns:a16="http://schemas.microsoft.com/office/drawing/2014/main" id="{107847DC-5562-43E9-A58B-2AF0F670DAB6}"/>
+                <a16:creationId xmlns:a16="http://schemas.microsoft.com/office/drawing/2014/main" id="{4595799A-3048-4533-A080-8B38E399A1AB}"/>
               </a:ext>
             </a:extLst>
           </p:cNvPr>
@@ -4471,7 +4471,7 @@
           <p:cNvPr id="4" name="">
             <a:extLst xmlns:a="http://schemas.openxmlformats.org/drawingml/2006/main">
               <a:ext uri="{FF2B5EF4-FFF2-40B4-BE49-F238E27FC236}">
-                <a16:creationId xmlns:a16="http://schemas.microsoft.com/office/drawing/2014/main" id="{2C7D8C7D-C9F5-408B-8450-E44958D9E9C9}"/>
+                <a16:creationId xmlns:a16="http://schemas.microsoft.com/office/drawing/2014/main" id="{A20BFF48-0AD1-45C9-928A-98A6B899B487}"/>
               </a:ext>
             </a:extLst>
           </p:cNvPr>
@@ -4528,7 +4528,7 @@
           <p:cNvPr id="5" name="">
             <a:extLst xmlns:a="http://schemas.openxmlformats.org/drawingml/2006/main">
               <a:ext uri="{FF2B5EF4-FFF2-40B4-BE49-F238E27FC236}">
-                <a16:creationId xmlns:a16="http://schemas.microsoft.com/office/drawing/2014/main" id="{DE1AF0AC-16A8-486F-93EA-06AB9189D835}"/>
+                <a16:creationId xmlns:a16="http://schemas.microsoft.com/office/drawing/2014/main" id="{FBAF2423-1B15-49F1-B668-5D44601121D8}"/>
               </a:ext>
             </a:extLst>
           </p:cNvPr>
@@ -4585,7 +4585,7 @@
           <p:cNvPr id="6" name="">
             <a:extLst xmlns:a="http://schemas.openxmlformats.org/drawingml/2006/main">
               <a:ext uri="{FF2B5EF4-FFF2-40B4-BE49-F238E27FC236}">
-                <a16:creationId xmlns:a16="http://schemas.microsoft.com/office/drawing/2014/main" id="{81B50988-EC88-46E7-92FD-E4733113C3EE}"/>
+                <a16:creationId xmlns:a16="http://schemas.microsoft.com/office/drawing/2014/main" id="{18316A2E-7F3B-4AD0-879E-7900E99E65E8}"/>
               </a:ext>
             </a:extLst>
           </p:cNvPr>
@@ -4642,7 +4642,7 @@
           <p:cNvPr id="7" name="">
             <a:extLst xmlns:a="http://schemas.openxmlformats.org/drawingml/2006/main">
               <a:ext uri="{FF2B5EF4-FFF2-40B4-BE49-F238E27FC236}">
-                <a16:creationId xmlns:a16="http://schemas.microsoft.com/office/drawing/2014/main" id="{8FC613C3-254B-4661-B8F2-662D410D4DB5}"/>
+                <a16:creationId xmlns:a16="http://schemas.microsoft.com/office/drawing/2014/main" id="{31E95CB2-CA07-4D84-9DAD-79514BEB8AE9}"/>
               </a:ext>
             </a:extLst>
           </p:cNvPr>
@@ -4674,7 +4674,7 @@
           <p:cNvPr id="8" name="">
             <a:extLst xmlns:a="http://schemas.openxmlformats.org/drawingml/2006/main">
               <a:ext uri="{FF2B5EF4-FFF2-40B4-BE49-F238E27FC236}">
-                <a16:creationId xmlns:a16="http://schemas.microsoft.com/office/drawing/2014/main" id="{745720FA-7CD4-4987-A502-5E3454FC4952}"/>
+                <a16:creationId xmlns:a16="http://schemas.microsoft.com/office/drawing/2014/main" id="{C703E881-97B0-4BBF-8E2B-FF7FA8E28845}"/>
               </a:ext>
             </a:extLst>
           </p:cNvPr>
@@ -4731,7 +4731,7 @@
           <p:cNvPr id="9" name="">
             <a:extLst xmlns:a="http://schemas.openxmlformats.org/drawingml/2006/main">
               <a:ext uri="{FF2B5EF4-FFF2-40B4-BE49-F238E27FC236}">
-                <a16:creationId xmlns:a16="http://schemas.microsoft.com/office/drawing/2014/main" id="{CD10174D-E456-4A01-A965-A23631EC14C3}"/>
+                <a16:creationId xmlns:a16="http://schemas.microsoft.com/office/drawing/2014/main" id="{93C4DE8D-5DF1-4CAA-AD0E-0CD77E7F2D10}"/>
               </a:ext>
             </a:extLst>
           </p:cNvPr>
@@ -4788,7 +4788,7 @@
           <p:cNvPr id="10" name="">
             <a:extLst xmlns:a="http://schemas.openxmlformats.org/drawingml/2006/main">
               <a:ext uri="{FF2B5EF4-FFF2-40B4-BE49-F238E27FC236}">
-                <a16:creationId xmlns:a16="http://schemas.microsoft.com/office/drawing/2014/main" id="{D1C0934E-C3C9-4F25-B455-EA1E0BB1BF89}"/>
+                <a16:creationId xmlns:a16="http://schemas.microsoft.com/office/drawing/2014/main" id="{9471C304-41F2-449F-B024-670AB6FEADCE}"/>
               </a:ext>
             </a:extLst>
           </p:cNvPr>
@@ -4822,7 +4822,7 @@
           <p:cNvPr id="11" name="">
             <a:extLst xmlns:a="http://schemas.openxmlformats.org/drawingml/2006/main">
               <a:ext uri="{FF2B5EF4-FFF2-40B4-BE49-F238E27FC236}">
-                <a16:creationId xmlns:a16="http://schemas.microsoft.com/office/drawing/2014/main" id="{6DEEC1A3-6345-4B2D-92F7-DD81B757481C}"/>
+                <a16:creationId xmlns:a16="http://schemas.microsoft.com/office/drawing/2014/main" id="{1CEECA31-69E1-4323-8767-CFC234A205A9}"/>
               </a:ext>
             </a:extLst>
           </p:cNvPr>
@@ -4854,7 +4854,7 @@
           <p:cNvPr id="12" name="">
             <a:extLst xmlns:a="http://schemas.openxmlformats.org/drawingml/2006/main">
               <a:ext uri="{FF2B5EF4-FFF2-40B4-BE49-F238E27FC236}">
-                <a16:creationId xmlns:a16="http://schemas.microsoft.com/office/drawing/2014/main" id="{AFC4727D-5113-4C57-8DC0-C159FA14A798}"/>
+                <a16:creationId xmlns:a16="http://schemas.microsoft.com/office/drawing/2014/main" id="{8800ED42-DAB4-4F01-A862-C1009EFD923D}"/>
               </a:ext>
             </a:extLst>
           </p:cNvPr>
@@ -4911,7 +4911,7 @@
           <p:cNvPr id="13" name="">
             <a:extLst xmlns:a="http://schemas.openxmlformats.org/drawingml/2006/main">
               <a:ext uri="{FF2B5EF4-FFF2-40B4-BE49-F238E27FC236}">
-                <a16:creationId xmlns:a16="http://schemas.microsoft.com/office/drawing/2014/main" id="{3735B6CE-54F3-46D5-AC4F-BDF30891A838}"/>
+                <a16:creationId xmlns:a16="http://schemas.microsoft.com/office/drawing/2014/main" id="{3B603A3C-1B8E-4939-8DEA-55BE3BEC089E}"/>
               </a:ext>
             </a:extLst>
           </p:cNvPr>
@@ -4968,7 +4968,7 @@
           <p:cNvPr id="14" name="">
             <a:extLst xmlns:a="http://schemas.openxmlformats.org/drawingml/2006/main">
               <a:ext uri="{FF2B5EF4-FFF2-40B4-BE49-F238E27FC236}">
-                <a16:creationId xmlns:a16="http://schemas.microsoft.com/office/drawing/2014/main" id="{16450826-AA51-4379-9D18-FF499A810970}"/>
+                <a16:creationId xmlns:a16="http://schemas.microsoft.com/office/drawing/2014/main" id="{02B558B8-9952-41D0-8AC2-DF5F5CCC7EBE}"/>
               </a:ext>
             </a:extLst>
           </p:cNvPr>
@@ -5002,7 +5002,7 @@
           <p:cNvPr id="15" name="">
             <a:extLst xmlns:a="http://schemas.openxmlformats.org/drawingml/2006/main">
               <a:ext uri="{FF2B5EF4-FFF2-40B4-BE49-F238E27FC236}">
-                <a16:creationId xmlns:a16="http://schemas.microsoft.com/office/drawing/2014/main" id="{6CFCEC54-3987-4DB5-B561-00F3EBDD4B54}"/>
+                <a16:creationId xmlns:a16="http://schemas.microsoft.com/office/drawing/2014/main" id="{847E12D9-2386-44B1-ACE7-4632C5DEF1F0}"/>
               </a:ext>
             </a:extLst>
           </p:cNvPr>
@@ -5034,7 +5034,7 @@
           <p:cNvPr id="16" name="">
             <a:extLst xmlns:a="http://schemas.openxmlformats.org/drawingml/2006/main">
               <a:ext uri="{FF2B5EF4-FFF2-40B4-BE49-F238E27FC236}">
-                <a16:creationId xmlns:a16="http://schemas.microsoft.com/office/drawing/2014/main" id="{136D2CE6-6EAA-434A-8ABE-941CF04AF7E8}"/>
+                <a16:creationId xmlns:a16="http://schemas.microsoft.com/office/drawing/2014/main" id="{F8B12B3F-3054-491F-845C-E3001A751BF6}"/>
               </a:ext>
             </a:extLst>
           </p:cNvPr>
@@ -5091,7 +5091,7 @@
           <p:cNvPr id="17" name="">
             <a:extLst xmlns:a="http://schemas.openxmlformats.org/drawingml/2006/main">
               <a:ext uri="{FF2B5EF4-FFF2-40B4-BE49-F238E27FC236}">
-                <a16:creationId xmlns:a16="http://schemas.microsoft.com/office/drawing/2014/main" id="{B297C73A-E219-49F3-BB52-7DDE143E9593}"/>
+                <a16:creationId xmlns:a16="http://schemas.microsoft.com/office/drawing/2014/main" id="{4EC1308F-AEE1-41B9-92F5-B1977FC13455}"/>
               </a:ext>
             </a:extLst>
           </p:cNvPr>
@@ -5148,7 +5148,7 @@
           <p:cNvPr id="18" name="">
             <a:extLst xmlns:a="http://schemas.openxmlformats.org/drawingml/2006/main">
               <a:ext uri="{FF2B5EF4-FFF2-40B4-BE49-F238E27FC236}">
-                <a16:creationId xmlns:a16="http://schemas.microsoft.com/office/drawing/2014/main" id="{B6770CD5-983B-4D74-874E-E0903E4153C0}"/>
+                <a16:creationId xmlns:a16="http://schemas.microsoft.com/office/drawing/2014/main" id="{AD5930AD-51B0-4F12-8349-6C22B1183FFD}"/>
               </a:ext>
             </a:extLst>
           </p:cNvPr>
@@ -5182,7 +5182,7 @@
           <p:cNvPr id="19" name="">
             <a:extLst xmlns:a="http://schemas.openxmlformats.org/drawingml/2006/main">
               <a:ext uri="{FF2B5EF4-FFF2-40B4-BE49-F238E27FC236}">
-                <a16:creationId xmlns:a16="http://schemas.microsoft.com/office/drawing/2014/main" id="{A921C9DA-7595-4AB6-95BB-3F7849DC937E}"/>
+                <a16:creationId xmlns:a16="http://schemas.microsoft.com/office/drawing/2014/main" id="{701E7D94-3D65-4BCE-B0A4-AFE3C68DD4CB}"/>
               </a:ext>
             </a:extLst>
           </p:cNvPr>
@@ -5214,7 +5214,7 @@
           <p:cNvPr id="20" name="">
             <a:extLst xmlns:a="http://schemas.openxmlformats.org/drawingml/2006/main">
               <a:ext uri="{FF2B5EF4-FFF2-40B4-BE49-F238E27FC236}">
-                <a16:creationId xmlns:a16="http://schemas.microsoft.com/office/drawing/2014/main" id="{C4DB7DF2-3D01-4DEF-BCAE-DD64BDB5451E}"/>
+                <a16:creationId xmlns:a16="http://schemas.microsoft.com/office/drawing/2014/main" id="{BD7E0009-6D0D-44CC-850E-5A40DFBC165F}"/>
               </a:ext>
             </a:extLst>
           </p:cNvPr>
@@ -5271,7 +5271,7 @@
           <p:cNvPr id="21" name="">
             <a:extLst xmlns:a="http://schemas.openxmlformats.org/drawingml/2006/main">
               <a:ext uri="{FF2B5EF4-FFF2-40B4-BE49-F238E27FC236}">
-                <a16:creationId xmlns:a16="http://schemas.microsoft.com/office/drawing/2014/main" id="{46649072-C6BF-440E-8632-44430E9CBFBC}"/>
+                <a16:creationId xmlns:a16="http://schemas.microsoft.com/office/drawing/2014/main" id="{CFCD66E8-3D81-4129-BA30-B5B62B3C55E6}"/>
               </a:ext>
             </a:extLst>
           </p:cNvPr>
@@ -5328,7 +5328,7 @@
           <p:cNvPr id="22" name="">
             <a:extLst xmlns:a="http://schemas.openxmlformats.org/drawingml/2006/main">
               <a:ext uri="{FF2B5EF4-FFF2-40B4-BE49-F238E27FC236}">
-                <a16:creationId xmlns:a16="http://schemas.microsoft.com/office/drawing/2014/main" id="{30254BCB-C589-42BD-AC1D-07F360043BCB}"/>
+                <a16:creationId xmlns:a16="http://schemas.microsoft.com/office/drawing/2014/main" id="{F8E613CC-CBA6-4EDF-8D89-9A4A5F292564}"/>
               </a:ext>
             </a:extLst>
           </p:cNvPr>
@@ -5383,7 +5383,7 @@
     </p:spTree>
     <p:extLst>
       <p:ext uri="{BB962C8B-B14F-4D97-AF65-F5344CB8AC3E}">
-        <p14:creationId xmlns:p14="http://schemas.microsoft.com/office/powerpoint/2010/main" val="757372209"/>
+        <p14:creationId xmlns:p14="http://schemas.microsoft.com/office/powerpoint/2010/main" val="1762832964"/>
       </p:ext>
     </p:extLst>
   </p:cSld>
@@ -5584,7 +5584,7 @@
           <p:cNvPr id="23" name="">
             <a:extLst xmlns:a="http://schemas.openxmlformats.org/drawingml/2006/main">
               <a:ext uri="{FF2B5EF4-FFF2-40B4-BE49-F238E27FC236}">
-                <a16:creationId xmlns:a16="http://schemas.microsoft.com/office/drawing/2014/main" id="{5F2BF403-7643-40BD-9C1C-4CAB5D2C3772}"/>
+                <a16:creationId xmlns:a16="http://schemas.microsoft.com/office/drawing/2014/main" id="{8BAC033E-0922-4884-9423-6BA16F617BFC}"/>
               </a:ext>
             </a:extLst>
           </p:cNvPr>
@@ -5616,7 +5616,7 @@
           <p:cNvPr id="2" name="">
             <a:extLst xmlns:a="http://schemas.openxmlformats.org/drawingml/2006/main">
               <a:ext uri="{FF2B5EF4-FFF2-40B4-BE49-F238E27FC236}">
-                <a16:creationId xmlns:a16="http://schemas.microsoft.com/office/drawing/2014/main" id="{53ADD541-E8A4-40FB-903F-C59AAEAA8CF2}"/>
+                <a16:creationId xmlns:a16="http://schemas.microsoft.com/office/drawing/2014/main" id="{84978099-3651-4121-8899-1012BACE80E0}"/>
               </a:ext>
             </a:extLst>
           </p:cNvPr>
@@ -5673,7 +5673,7 @@
           <p:cNvPr id="3" name="">
             <a:extLst xmlns:a="http://schemas.openxmlformats.org/drawingml/2006/main">
               <a:ext uri="{FF2B5EF4-FFF2-40B4-BE49-F238E27FC236}">
-                <a16:creationId xmlns:a16="http://schemas.microsoft.com/office/drawing/2014/main" id="{D8FF2FD2-88FB-4C99-9613-13B135D48441}"/>
+                <a16:creationId xmlns:a16="http://schemas.microsoft.com/office/drawing/2014/main" id="{E28F1861-DCCB-4D41-B34A-5D3F6A77ED24}"/>
               </a:ext>
             </a:extLst>
           </p:cNvPr>
@@ -5705,7 +5705,7 @@
           <p:cNvPr id="4" name="">
             <a:extLst xmlns:a="http://schemas.openxmlformats.org/drawingml/2006/main">
               <a:ext uri="{FF2B5EF4-FFF2-40B4-BE49-F238E27FC236}">
-                <a16:creationId xmlns:a16="http://schemas.microsoft.com/office/drawing/2014/main" id="{83D9D846-B291-4D9D-9469-BD4ACB5CBC13}"/>
+                <a16:creationId xmlns:a16="http://schemas.microsoft.com/office/drawing/2014/main" id="{D460CE7F-5D2F-4E89-90D0-2214DC7B6270}"/>
               </a:ext>
             </a:extLst>
           </p:cNvPr>
@@ -5762,7 +5762,7 @@
           <p:cNvPr id="5" name="">
             <a:extLst xmlns:a="http://schemas.openxmlformats.org/drawingml/2006/main">
               <a:ext uri="{FF2B5EF4-FFF2-40B4-BE49-F238E27FC236}">
-                <a16:creationId xmlns:a16="http://schemas.microsoft.com/office/drawing/2014/main" id="{D7E0AC51-E73B-4006-9B31-C7460B4BEB4C}"/>
+                <a16:creationId xmlns:a16="http://schemas.microsoft.com/office/drawing/2014/main" id="{C3591E71-FFDE-4569-BDE0-A0D0C1DB738D}"/>
               </a:ext>
             </a:extLst>
           </p:cNvPr>
@@ -5819,7 +5819,7 @@
           <p:cNvPr id="6" name="">
             <a:extLst xmlns:a="http://schemas.openxmlformats.org/drawingml/2006/main">
               <a:ext uri="{FF2B5EF4-FFF2-40B4-BE49-F238E27FC236}">
-                <a16:creationId xmlns:a16="http://schemas.microsoft.com/office/drawing/2014/main" id="{CBC7E39D-0FF6-4DF2-A5C0-83BD32B1BED5}"/>
+                <a16:creationId xmlns:a16="http://schemas.microsoft.com/office/drawing/2014/main" id="{5875E099-60CD-42EC-8342-9283DC3277A1}"/>
               </a:ext>
             </a:extLst>
           </p:cNvPr>
@@ -5876,7 +5876,7 @@
           <p:cNvPr id="7" name="">
             <a:extLst xmlns:a="http://schemas.openxmlformats.org/drawingml/2006/main">
               <a:ext uri="{FF2B5EF4-FFF2-40B4-BE49-F238E27FC236}">
-                <a16:creationId xmlns:a16="http://schemas.microsoft.com/office/drawing/2014/main" id="{80563185-C157-48B1-8AC2-C7A78F2F9BD2}"/>
+                <a16:creationId xmlns:a16="http://schemas.microsoft.com/office/drawing/2014/main" id="{E792E2EC-06BF-40E0-BB13-CA183C49EB9B}"/>
               </a:ext>
             </a:extLst>
           </p:cNvPr>
@@ -5908,7 +5908,7 @@
           <p:cNvPr id="8" name="">
             <a:extLst xmlns:a="http://schemas.openxmlformats.org/drawingml/2006/main">
               <a:ext uri="{FF2B5EF4-FFF2-40B4-BE49-F238E27FC236}">
-                <a16:creationId xmlns:a16="http://schemas.microsoft.com/office/drawing/2014/main" id="{09069DDF-FE41-4ACC-8B25-7F0D3132F178}"/>
+                <a16:creationId xmlns:a16="http://schemas.microsoft.com/office/drawing/2014/main" id="{41093A6E-4837-44C6-8671-E6AA509BA68B}"/>
               </a:ext>
             </a:extLst>
           </p:cNvPr>
@@ -5965,7 +5965,7 @@
           <p:cNvPr id="9" name="">
             <a:extLst xmlns:a="http://schemas.openxmlformats.org/drawingml/2006/main">
               <a:ext uri="{FF2B5EF4-FFF2-40B4-BE49-F238E27FC236}">
-                <a16:creationId xmlns:a16="http://schemas.microsoft.com/office/drawing/2014/main" id="{F0B9C1A3-1D46-46DE-9699-B4930DF082E1}"/>
+                <a16:creationId xmlns:a16="http://schemas.microsoft.com/office/drawing/2014/main" id="{2BEB360C-C865-4088-A3E7-B817D483AB71}"/>
               </a:ext>
             </a:extLst>
           </p:cNvPr>
@@ -6022,7 +6022,7 @@
           <p:cNvPr id="10" name="">
             <a:extLst xmlns:a="http://schemas.openxmlformats.org/drawingml/2006/main">
               <a:ext uri="{FF2B5EF4-FFF2-40B4-BE49-F238E27FC236}">
-                <a16:creationId xmlns:a16="http://schemas.microsoft.com/office/drawing/2014/main" id="{C35E9AEF-783C-474F-924E-A9AA93C91A17}"/>
+                <a16:creationId xmlns:a16="http://schemas.microsoft.com/office/drawing/2014/main" id="{2D389938-35D9-4147-96D3-94F19EB8D708}"/>
               </a:ext>
             </a:extLst>
           </p:cNvPr>
@@ -6056,7 +6056,7 @@
           <p:cNvPr id="11" name="">
             <a:extLst xmlns:a="http://schemas.openxmlformats.org/drawingml/2006/main">
               <a:ext uri="{FF2B5EF4-FFF2-40B4-BE49-F238E27FC236}">
-                <a16:creationId xmlns:a16="http://schemas.microsoft.com/office/drawing/2014/main" id="{AB8A2402-2AE5-41E4-A996-553FB2520CFE}"/>
+                <a16:creationId xmlns:a16="http://schemas.microsoft.com/office/drawing/2014/main" id="{E1C9CC7C-D724-4B5E-90EC-9436B963D01D}"/>
               </a:ext>
             </a:extLst>
           </p:cNvPr>
@@ -6088,7 +6088,7 @@
           <p:cNvPr id="12" name="">
             <a:extLst xmlns:a="http://schemas.openxmlformats.org/drawingml/2006/main">
               <a:ext uri="{FF2B5EF4-FFF2-40B4-BE49-F238E27FC236}">
-                <a16:creationId xmlns:a16="http://schemas.microsoft.com/office/drawing/2014/main" id="{90E6FCDB-04BB-4BA6-9A14-0BB53B793072}"/>
+                <a16:creationId xmlns:a16="http://schemas.microsoft.com/office/drawing/2014/main" id="{B4613734-104E-4AC8-B601-C20533F979B7}"/>
               </a:ext>
             </a:extLst>
           </p:cNvPr>
@@ -6145,7 +6145,7 @@
           <p:cNvPr id="13" name="">
             <a:extLst xmlns:a="http://schemas.openxmlformats.org/drawingml/2006/main">
               <a:ext uri="{FF2B5EF4-FFF2-40B4-BE49-F238E27FC236}">
-                <a16:creationId xmlns:a16="http://schemas.microsoft.com/office/drawing/2014/main" id="{2FC23BEB-0D98-4FAB-B84A-6ECAD6396CA6}"/>
+                <a16:creationId xmlns:a16="http://schemas.microsoft.com/office/drawing/2014/main" id="{0C2B3373-08CA-425B-9920-90DAFB01C6B3}"/>
               </a:ext>
             </a:extLst>
           </p:cNvPr>
@@ -6202,7 +6202,7 @@
           <p:cNvPr id="14" name="">
             <a:extLst xmlns:a="http://schemas.openxmlformats.org/drawingml/2006/main">
               <a:ext uri="{FF2B5EF4-FFF2-40B4-BE49-F238E27FC236}">
-                <a16:creationId xmlns:a16="http://schemas.microsoft.com/office/drawing/2014/main" id="{C1CD7653-ECFC-4143-AF87-F85D3291E823}"/>
+                <a16:creationId xmlns:a16="http://schemas.microsoft.com/office/drawing/2014/main" id="{59B84FC3-2051-40E8-AF61-A73BA2587FBB}"/>
               </a:ext>
             </a:extLst>
           </p:cNvPr>
@@ -6236,7 +6236,7 @@
           <p:cNvPr id="15" name="">
             <a:extLst xmlns:a="http://schemas.openxmlformats.org/drawingml/2006/main">
               <a:ext uri="{FF2B5EF4-FFF2-40B4-BE49-F238E27FC236}">
-                <a16:creationId xmlns:a16="http://schemas.microsoft.com/office/drawing/2014/main" id="{A2974C57-F44E-4705-806C-8717485BAC83}"/>
+                <a16:creationId xmlns:a16="http://schemas.microsoft.com/office/drawing/2014/main" id="{AC0A348F-A50A-4125-B641-8A9AC08C05C2}"/>
               </a:ext>
             </a:extLst>
           </p:cNvPr>
@@ -6268,7 +6268,7 @@
           <p:cNvPr id="16" name="">
             <a:extLst xmlns:a="http://schemas.openxmlformats.org/drawingml/2006/main">
               <a:ext uri="{FF2B5EF4-FFF2-40B4-BE49-F238E27FC236}">
-                <a16:creationId xmlns:a16="http://schemas.microsoft.com/office/drawing/2014/main" id="{7175F953-9850-4D60-98DD-6C2B9AB0FBF9}"/>
+                <a16:creationId xmlns:a16="http://schemas.microsoft.com/office/drawing/2014/main" id="{6512A948-1E63-490D-BE6B-62435C40034F}"/>
               </a:ext>
             </a:extLst>
           </p:cNvPr>
@@ -6325,7 +6325,7 @@
           <p:cNvPr id="17" name="">
             <a:extLst xmlns:a="http://schemas.openxmlformats.org/drawingml/2006/main">
               <a:ext uri="{FF2B5EF4-FFF2-40B4-BE49-F238E27FC236}">
-                <a16:creationId xmlns:a16="http://schemas.microsoft.com/office/drawing/2014/main" id="{AEC73B98-923B-4403-AD2A-FFD477FB7129}"/>
+                <a16:creationId xmlns:a16="http://schemas.microsoft.com/office/drawing/2014/main" id="{74E01359-FFEE-4833-BB02-621691C7867C}"/>
               </a:ext>
             </a:extLst>
           </p:cNvPr>
@@ -6382,7 +6382,7 @@
           <p:cNvPr id="18" name="">
             <a:extLst xmlns:a="http://schemas.openxmlformats.org/drawingml/2006/main">
               <a:ext uri="{FF2B5EF4-FFF2-40B4-BE49-F238E27FC236}">
-                <a16:creationId xmlns:a16="http://schemas.microsoft.com/office/drawing/2014/main" id="{A39B3065-D4D0-4584-B6CC-8D29A839BBD1}"/>
+                <a16:creationId xmlns:a16="http://schemas.microsoft.com/office/drawing/2014/main" id="{0FB05AC5-C92F-425C-9569-357A93FAE7EC}"/>
               </a:ext>
             </a:extLst>
           </p:cNvPr>
@@ -6416,7 +6416,7 @@
           <p:cNvPr id="19" name="">
             <a:extLst xmlns:a="http://schemas.openxmlformats.org/drawingml/2006/main">
               <a:ext uri="{FF2B5EF4-FFF2-40B4-BE49-F238E27FC236}">
-                <a16:creationId xmlns:a16="http://schemas.microsoft.com/office/drawing/2014/main" id="{BD0008C3-C31D-4EB2-AD62-F382A135D16E}"/>
+                <a16:creationId xmlns:a16="http://schemas.microsoft.com/office/drawing/2014/main" id="{8E35153B-97EE-4E60-BD1E-42A27909F49B}"/>
               </a:ext>
             </a:extLst>
           </p:cNvPr>
@@ -6448,7 +6448,7 @@
           <p:cNvPr id="20" name="">
             <a:extLst xmlns:a="http://schemas.openxmlformats.org/drawingml/2006/main">
               <a:ext uri="{FF2B5EF4-FFF2-40B4-BE49-F238E27FC236}">
-                <a16:creationId xmlns:a16="http://schemas.microsoft.com/office/drawing/2014/main" id="{4AAE9751-FF0B-4338-948A-EB77884837F9}"/>
+                <a16:creationId xmlns:a16="http://schemas.microsoft.com/office/drawing/2014/main" id="{F9E88715-81C0-4FFF-BF34-F067305BC315}"/>
               </a:ext>
             </a:extLst>
           </p:cNvPr>
@@ -6505,7 +6505,7 @@
           <p:cNvPr id="21" name="">
             <a:extLst xmlns:a="http://schemas.openxmlformats.org/drawingml/2006/main">
               <a:ext uri="{FF2B5EF4-FFF2-40B4-BE49-F238E27FC236}">
-                <a16:creationId xmlns:a16="http://schemas.microsoft.com/office/drawing/2014/main" id="{43596314-A693-49C2-84BA-2603004F8AA8}"/>
+                <a16:creationId xmlns:a16="http://schemas.microsoft.com/office/drawing/2014/main" id="{02165C8D-09D8-4D60-9694-38C769EE4FDA}"/>
               </a:ext>
             </a:extLst>
           </p:cNvPr>
@@ -6562,7 +6562,7 @@
           <p:cNvPr id="22" name="">
             <a:extLst xmlns:a="http://schemas.openxmlformats.org/drawingml/2006/main">
               <a:ext uri="{FF2B5EF4-FFF2-40B4-BE49-F238E27FC236}">
-                <a16:creationId xmlns:a16="http://schemas.microsoft.com/office/drawing/2014/main" id="{B6C548E9-4820-472B-8CE2-CF2A83E5A993}"/>
+                <a16:creationId xmlns:a16="http://schemas.microsoft.com/office/drawing/2014/main" id="{18C66B2C-16CD-4B40-893B-96B9CE71FE9A}"/>
               </a:ext>
             </a:extLst>
           </p:cNvPr>
@@ -6617,7 +6617,7 @@
     </p:spTree>
     <p:extLst>
       <p:ext uri="{BB962C8B-B14F-4D97-AF65-F5344CB8AC3E}">
-        <p14:creationId xmlns:p14="http://schemas.microsoft.com/office/powerpoint/2010/main" val="260465155"/>
+        <p14:creationId xmlns:p14="http://schemas.microsoft.com/office/powerpoint/2010/main" val="1208654346"/>
       </p:ext>
     </p:extLst>
   </p:cSld>
@@ -6818,7 +6818,7 @@
           <p:cNvPr id="16" name="">
             <a:extLst xmlns:a="http://schemas.openxmlformats.org/drawingml/2006/main">
               <a:ext uri="{FF2B5EF4-FFF2-40B4-BE49-F238E27FC236}">
-                <a16:creationId xmlns:a16="http://schemas.microsoft.com/office/drawing/2014/main" id="{A9DF09B6-EDDD-4D38-A014-31F63E7F4AFB}"/>
+                <a16:creationId xmlns:a16="http://schemas.microsoft.com/office/drawing/2014/main" id="{A21B49BB-86AB-4CC2-9C37-34CDF93FD54B}"/>
               </a:ext>
             </a:extLst>
           </p:cNvPr>
@@ -6850,7 +6850,7 @@
           <p:cNvPr id="2" name="">
             <a:extLst xmlns:a="http://schemas.openxmlformats.org/drawingml/2006/main">
               <a:ext uri="{FF2B5EF4-FFF2-40B4-BE49-F238E27FC236}">
-                <a16:creationId xmlns:a16="http://schemas.microsoft.com/office/drawing/2014/main" id="{CB9E04C0-1CC0-4DAC-92F0-23D22468EAD6}"/>
+                <a16:creationId xmlns:a16="http://schemas.microsoft.com/office/drawing/2014/main" id="{B3CCEB06-FC07-4BB9-8405-0FBFE822579E}"/>
               </a:ext>
             </a:extLst>
           </p:cNvPr>
@@ -6907,7 +6907,7 @@
           <p:cNvPr id="3" name="">
             <a:extLst xmlns:a="http://schemas.openxmlformats.org/drawingml/2006/main">
               <a:ext uri="{FF2B5EF4-FFF2-40B4-BE49-F238E27FC236}">
-                <a16:creationId xmlns:a16="http://schemas.microsoft.com/office/drawing/2014/main" id="{B8DC8962-424A-45F1-8A77-A3AB7D03381D}"/>
+                <a16:creationId xmlns:a16="http://schemas.microsoft.com/office/drawing/2014/main" id="{BE064FE1-B72F-4D54-B493-52524C8BD54D}"/>
               </a:ext>
             </a:extLst>
           </p:cNvPr>
@@ -6939,7 +6939,7 @@
           <p:cNvPr id="4" name="">
             <a:extLst xmlns:a="http://schemas.openxmlformats.org/drawingml/2006/main">
               <a:ext uri="{FF2B5EF4-FFF2-40B4-BE49-F238E27FC236}">
-                <a16:creationId xmlns:a16="http://schemas.microsoft.com/office/drawing/2014/main" id="{0487DC3E-1C4E-4C10-9B5D-579AFD381560}"/>
+                <a16:creationId xmlns:a16="http://schemas.microsoft.com/office/drawing/2014/main" id="{CD5D7BD0-221E-4638-AA0C-DC4B5B08328C}"/>
               </a:ext>
             </a:extLst>
           </p:cNvPr>
@@ -6996,7 +6996,7 @@
           <p:cNvPr id="5" name="">
             <a:extLst xmlns:a="http://schemas.openxmlformats.org/drawingml/2006/main">
               <a:ext uri="{FF2B5EF4-FFF2-40B4-BE49-F238E27FC236}">
-                <a16:creationId xmlns:a16="http://schemas.microsoft.com/office/drawing/2014/main" id="{EF564413-6325-44D1-AC60-05F8B9B85A2F}"/>
+                <a16:creationId xmlns:a16="http://schemas.microsoft.com/office/drawing/2014/main" id="{2B2982C7-7F4E-4564-ABFA-EFF9C3760D49}"/>
               </a:ext>
             </a:extLst>
           </p:cNvPr>
@@ -7053,7 +7053,7 @@
           <p:cNvPr id="6" name="">
             <a:extLst xmlns:a="http://schemas.openxmlformats.org/drawingml/2006/main">
               <a:ext uri="{FF2B5EF4-FFF2-40B4-BE49-F238E27FC236}">
-                <a16:creationId xmlns:a16="http://schemas.microsoft.com/office/drawing/2014/main" id="{18662AAA-941A-478B-A685-9A7C97EFDD27}"/>
+                <a16:creationId xmlns:a16="http://schemas.microsoft.com/office/drawing/2014/main" id="{22F888F8-1813-4282-B86D-C2EE6C50B868}"/>
               </a:ext>
             </a:extLst>
           </p:cNvPr>
@@ -7110,7 +7110,7 @@
           <p:cNvPr id="7" name="">
             <a:extLst xmlns:a="http://schemas.openxmlformats.org/drawingml/2006/main">
               <a:ext uri="{FF2B5EF4-FFF2-40B4-BE49-F238E27FC236}">
-                <a16:creationId xmlns:a16="http://schemas.microsoft.com/office/drawing/2014/main" id="{F3506D81-05FC-4F96-9E93-8478B9D6C436}"/>
+                <a16:creationId xmlns:a16="http://schemas.microsoft.com/office/drawing/2014/main" id="{EABBF53B-338B-4A77-BE8C-7FB9D1E4E50A}"/>
               </a:ext>
             </a:extLst>
           </p:cNvPr>
@@ -7142,7 +7142,7 @@
           <p:cNvPr id="8" name="">
             <a:extLst xmlns:a="http://schemas.openxmlformats.org/drawingml/2006/main">
               <a:ext uri="{FF2B5EF4-FFF2-40B4-BE49-F238E27FC236}">
-                <a16:creationId xmlns:a16="http://schemas.microsoft.com/office/drawing/2014/main" id="{9A053D39-4554-4C7F-AD14-EB343026A648}"/>
+                <a16:creationId xmlns:a16="http://schemas.microsoft.com/office/drawing/2014/main" id="{767F5FD4-5C02-4F14-8F77-88016A2D0A52}"/>
               </a:ext>
             </a:extLst>
           </p:cNvPr>
@@ -7199,7 +7199,7 @@
           <p:cNvPr id="9" name="">
             <a:extLst xmlns:a="http://schemas.openxmlformats.org/drawingml/2006/main">
               <a:ext uri="{FF2B5EF4-FFF2-40B4-BE49-F238E27FC236}">
-                <a16:creationId xmlns:a16="http://schemas.microsoft.com/office/drawing/2014/main" id="{50DC60BD-F716-410E-9BBE-A4FC1475649B}"/>
+                <a16:creationId xmlns:a16="http://schemas.microsoft.com/office/drawing/2014/main" id="{F0C88A3A-3F75-4ADA-9DC5-7AE943567F5E}"/>
               </a:ext>
             </a:extLst>
           </p:cNvPr>
@@ -7256,7 +7256,7 @@
           <p:cNvPr id="10" name="">
             <a:extLst xmlns:a="http://schemas.openxmlformats.org/drawingml/2006/main">
               <a:ext uri="{FF2B5EF4-FFF2-40B4-BE49-F238E27FC236}">
-                <a16:creationId xmlns:a16="http://schemas.microsoft.com/office/drawing/2014/main" id="{35ACA01F-AD1C-40E0-8B50-A8B26C1CB05A}"/>
+                <a16:creationId xmlns:a16="http://schemas.microsoft.com/office/drawing/2014/main" id="{3B2D5962-3AE7-43D5-A152-B14414008701}"/>
               </a:ext>
             </a:extLst>
           </p:cNvPr>
@@ -7313,7 +7313,7 @@
           <p:cNvPr id="11" name="">
             <a:extLst xmlns:a="http://schemas.openxmlformats.org/drawingml/2006/main">
               <a:ext uri="{FF2B5EF4-FFF2-40B4-BE49-F238E27FC236}">
-                <a16:creationId xmlns:a16="http://schemas.microsoft.com/office/drawing/2014/main" id="{7617EDB6-1073-47CF-95F7-DC8F0A389B02}"/>
+                <a16:creationId xmlns:a16="http://schemas.microsoft.com/office/drawing/2014/main" id="{C7C6BB78-4E24-43D5-9590-3CE5A672D9E2}"/>
               </a:ext>
             </a:extLst>
           </p:cNvPr>
@@ -7345,7 +7345,7 @@
           <p:cNvPr id="12" name="">
             <a:extLst xmlns:a="http://schemas.openxmlformats.org/drawingml/2006/main">
               <a:ext uri="{FF2B5EF4-FFF2-40B4-BE49-F238E27FC236}">
-                <a16:creationId xmlns:a16="http://schemas.microsoft.com/office/drawing/2014/main" id="{D8B8043A-903A-4365-A96D-843306B9A3B2}"/>
+                <a16:creationId xmlns:a16="http://schemas.microsoft.com/office/drawing/2014/main" id="{44F828E8-36E8-460E-BF96-0D2F2912A208}"/>
               </a:ext>
             </a:extLst>
           </p:cNvPr>
@@ -7402,7 +7402,7 @@
           <p:cNvPr id="13" name="">
             <a:extLst xmlns:a="http://schemas.openxmlformats.org/drawingml/2006/main">
               <a:ext uri="{FF2B5EF4-FFF2-40B4-BE49-F238E27FC236}">
-                <a16:creationId xmlns:a16="http://schemas.microsoft.com/office/drawing/2014/main" id="{16307D22-D118-4F2B-AFAE-F35100832073}"/>
+                <a16:creationId xmlns:a16="http://schemas.microsoft.com/office/drawing/2014/main" id="{371500C7-5399-4D23-ABE0-1EDC5A3898FA}"/>
               </a:ext>
             </a:extLst>
           </p:cNvPr>
@@ -7459,7 +7459,7 @@
           <p:cNvPr id="14" name="">
             <a:extLst xmlns:a="http://schemas.openxmlformats.org/drawingml/2006/main">
               <a:ext uri="{FF2B5EF4-FFF2-40B4-BE49-F238E27FC236}">
-                <a16:creationId xmlns:a16="http://schemas.microsoft.com/office/drawing/2014/main" id="{97FBEFEC-FC1A-43EB-AA96-B092489BE17C}"/>
+                <a16:creationId xmlns:a16="http://schemas.microsoft.com/office/drawing/2014/main" id="{C3E9C7C0-FDDA-43EA-BB05-60E9E2324481}"/>
               </a:ext>
             </a:extLst>
           </p:cNvPr>
@@ -7516,7 +7516,7 @@
           <p:cNvPr id="15" name="">
             <a:extLst xmlns:a="http://schemas.openxmlformats.org/drawingml/2006/main">
               <a:ext uri="{FF2B5EF4-FFF2-40B4-BE49-F238E27FC236}">
-                <a16:creationId xmlns:a16="http://schemas.microsoft.com/office/drawing/2014/main" id="{E31D5F16-3D11-4B05-AFB7-DED4001981AC}"/>
+                <a16:creationId xmlns:a16="http://schemas.microsoft.com/office/drawing/2014/main" id="{F22A12FB-D133-4AB9-A136-7DC5A0177892}"/>
               </a:ext>
             </a:extLst>
           </p:cNvPr>
@@ -7571,7 +7571,7 @@
     </p:spTree>
     <p:extLst>
       <p:ext uri="{BB962C8B-B14F-4D97-AF65-F5344CB8AC3E}">
-        <p14:creationId xmlns:p14="http://schemas.microsoft.com/office/powerpoint/2010/main" val="1504762298"/>
+        <p14:creationId xmlns:p14="http://schemas.microsoft.com/office/powerpoint/2010/main" val="1507104483"/>
       </p:ext>
     </p:extLst>
   </p:cSld>
@@ -7772,7 +7772,7 @@
           <p:cNvPr id="23" name="">
             <a:extLst xmlns:a="http://schemas.openxmlformats.org/drawingml/2006/main">
               <a:ext uri="{FF2B5EF4-FFF2-40B4-BE49-F238E27FC236}">
-                <a16:creationId xmlns:a16="http://schemas.microsoft.com/office/drawing/2014/main" id="{F0124A41-3698-4820-87E1-F19D098DC8BC}"/>
+                <a16:creationId xmlns:a16="http://schemas.microsoft.com/office/drawing/2014/main" id="{9B1D0E30-3377-44E5-AE31-7A05C83052B9}"/>
               </a:ext>
             </a:extLst>
           </p:cNvPr>
@@ -7804,7 +7804,7 @@
           <p:cNvPr id="2" name="">
             <a:extLst xmlns:a="http://schemas.openxmlformats.org/drawingml/2006/main">
               <a:ext uri="{FF2B5EF4-FFF2-40B4-BE49-F238E27FC236}">
-                <a16:creationId xmlns:a16="http://schemas.microsoft.com/office/drawing/2014/main" id="{1D864782-1C0A-4122-9516-72130E7B7E9A}"/>
+                <a16:creationId xmlns:a16="http://schemas.microsoft.com/office/drawing/2014/main" id="{23AFD3C8-C22A-4059-A8DA-559B006B06C2}"/>
               </a:ext>
             </a:extLst>
           </p:cNvPr>
@@ -7861,7 +7861,7 @@
           <p:cNvPr id="3" name="">
             <a:extLst xmlns:a="http://schemas.openxmlformats.org/drawingml/2006/main">
               <a:ext uri="{FF2B5EF4-FFF2-40B4-BE49-F238E27FC236}">
-                <a16:creationId xmlns:a16="http://schemas.microsoft.com/office/drawing/2014/main" id="{EB28D66E-F59D-4CC1-B5F9-782A0C536B9A}"/>
+                <a16:creationId xmlns:a16="http://schemas.microsoft.com/office/drawing/2014/main" id="{4281647E-FC91-4196-BDB7-F0BA11B9ACF0}"/>
               </a:ext>
             </a:extLst>
           </p:cNvPr>
@@ -7893,7 +7893,7 @@
           <p:cNvPr id="4" name="">
             <a:extLst xmlns:a="http://schemas.openxmlformats.org/drawingml/2006/main">
               <a:ext uri="{FF2B5EF4-FFF2-40B4-BE49-F238E27FC236}">
-                <a16:creationId xmlns:a16="http://schemas.microsoft.com/office/drawing/2014/main" id="{C47A2435-6A1B-41F2-91E2-BB11CFD6084F}"/>
+                <a16:creationId xmlns:a16="http://schemas.microsoft.com/office/drawing/2014/main" id="{1FC1196E-1A41-4FD4-8E58-AE456BF8606A}"/>
               </a:ext>
             </a:extLst>
           </p:cNvPr>
@@ -7950,7 +7950,7 @@
           <p:cNvPr id="5" name="">
             <a:extLst xmlns:a="http://schemas.openxmlformats.org/drawingml/2006/main">
               <a:ext uri="{FF2B5EF4-FFF2-40B4-BE49-F238E27FC236}">
-                <a16:creationId xmlns:a16="http://schemas.microsoft.com/office/drawing/2014/main" id="{93C62131-A790-4BF9-8869-1AEB0A9935AD}"/>
+                <a16:creationId xmlns:a16="http://schemas.microsoft.com/office/drawing/2014/main" id="{28E6175F-F06C-43CF-834C-B5335E12DC5F}"/>
               </a:ext>
             </a:extLst>
           </p:cNvPr>
@@ -8007,7 +8007,7 @@
           <p:cNvPr id="6" name="">
             <a:extLst xmlns:a="http://schemas.openxmlformats.org/drawingml/2006/main">
               <a:ext uri="{FF2B5EF4-FFF2-40B4-BE49-F238E27FC236}">
-                <a16:creationId xmlns:a16="http://schemas.microsoft.com/office/drawing/2014/main" id="{5FD96044-F1EC-4F8A-AE0A-C0B9F233BF4E}"/>
+                <a16:creationId xmlns:a16="http://schemas.microsoft.com/office/drawing/2014/main" id="{5C08E64C-9403-4EBE-8D72-2767062002BF}"/>
               </a:ext>
             </a:extLst>
           </p:cNvPr>
@@ -8064,7 +8064,7 @@
           <p:cNvPr id="7" name="">
             <a:extLst xmlns:a="http://schemas.openxmlformats.org/drawingml/2006/main">
               <a:ext uri="{FF2B5EF4-FFF2-40B4-BE49-F238E27FC236}">
-                <a16:creationId xmlns:a16="http://schemas.microsoft.com/office/drawing/2014/main" id="{A2496E4F-5932-47E3-9C1D-C0E6649BBB42}"/>
+                <a16:creationId xmlns:a16="http://schemas.microsoft.com/office/drawing/2014/main" id="{766177C6-D8CD-4247-AD28-8BF5DDAB2FF8}"/>
               </a:ext>
             </a:extLst>
           </p:cNvPr>
@@ -8096,7 +8096,7 @@
           <p:cNvPr id="8" name="">
             <a:extLst xmlns:a="http://schemas.openxmlformats.org/drawingml/2006/main">
               <a:ext uri="{FF2B5EF4-FFF2-40B4-BE49-F238E27FC236}">
-                <a16:creationId xmlns:a16="http://schemas.microsoft.com/office/drawing/2014/main" id="{CFF88583-AB78-4E88-AB85-27A2257855FD}"/>
+                <a16:creationId xmlns:a16="http://schemas.microsoft.com/office/drawing/2014/main" id="{7502CCF0-1BF4-428E-BFCB-2FE1255ABA1D}"/>
               </a:ext>
             </a:extLst>
           </p:cNvPr>
@@ -8153,7 +8153,7 @@
           <p:cNvPr id="9" name="">
             <a:extLst xmlns:a="http://schemas.openxmlformats.org/drawingml/2006/main">
               <a:ext uri="{FF2B5EF4-FFF2-40B4-BE49-F238E27FC236}">
-                <a16:creationId xmlns:a16="http://schemas.microsoft.com/office/drawing/2014/main" id="{4A0D351B-D184-487B-AAC8-CFF407054487}"/>
+                <a16:creationId xmlns:a16="http://schemas.microsoft.com/office/drawing/2014/main" id="{63F3604A-E013-431F-8E62-4D092DB0C5D0}"/>
               </a:ext>
             </a:extLst>
           </p:cNvPr>
@@ -8210,19 +8210,19 @@
           <p:cNvPr id="10" name="">
             <a:extLst xmlns:a="http://schemas.openxmlformats.org/drawingml/2006/main">
               <a:ext uri="{FF2B5EF4-FFF2-40B4-BE49-F238E27FC236}">
-                <a16:creationId xmlns:a16="http://schemas.microsoft.com/office/drawing/2014/main" id="{87D82715-DCDA-41B7-B307-8B16DEE5A2E8}"/>
-              </a:ext>
-            </a:extLst>
-          </p:cNvPr>
-          <p:cNvSpPr>
-            <a:spLocks xmlns:a="http://schemas.openxmlformats.org/drawingml/2006/main" noGrp="1"/>
-          </p:cNvSpPr>
-          <p:nvPr/>
-        </p:nvSpPr>
-        <p:spPr>
-          <a:xfrm xmlns:a="http://schemas.openxmlformats.org/drawingml/2006/main">
-            <a:off x="914400" y="1257300"/>
-            <a:ext cx="10363200" cy="781050"/>
+                <a16:creationId xmlns:a16="http://schemas.microsoft.com/office/drawing/2014/main" id="{422CA4BB-85E4-4338-B4AE-D2DFB9875005}"/>
+              </a:ext>
+            </a:extLst>
+          </p:cNvPr>
+          <p:cNvSpPr>
+            <a:spLocks xmlns:a="http://schemas.openxmlformats.org/drawingml/2006/main" noGrp="1"/>
+          </p:cNvSpPr>
+          <p:nvPr/>
+        </p:nvSpPr>
+        <p:spPr>
+          <a:xfrm xmlns:a="http://schemas.openxmlformats.org/drawingml/2006/main">
+            <a:off x="857250" y="1219200"/>
+            <a:ext cx="10477500" cy="742950"/>
           </a:xfrm>
           <a:prstGeom xmlns:a="http://schemas.openxmlformats.org/drawingml/2006/main" prst="rect">
             <a:avLst/>
@@ -8239,7 +8239,7 @@
           <a:lstStyle xmlns:a="http://schemas.openxmlformats.org/drawingml/2006/main"/>
           <a:p xmlns:a="http://schemas.openxmlformats.org/drawingml/2006/main">
             <a:pPr algn="ctr">
-              <a:defRPr sz="2175" b="1">
+              <a:defRPr sz="2100" b="1">
                 <a:solidFill>
                   <a:srgbClr val="17253A"/>
                 </a:solidFill>
@@ -8249,7 +8249,7 @@
               </a:defRPr>
             </a:pPr>
             <a:r>
-              <a:rPr sz="2175" b="1">
+              <a:rPr sz="2100" b="1">
                 <a:solidFill>
                   <a:srgbClr val="17253A"/>
                 </a:solidFill>
@@ -8267,28 +8267,30 @@
           <p:cNvPr id="11" name="">
             <a:extLst xmlns:a="http://schemas.openxmlformats.org/drawingml/2006/main">
               <a:ext uri="{FF2B5EF4-FFF2-40B4-BE49-F238E27FC236}">
-                <a16:creationId xmlns:a16="http://schemas.microsoft.com/office/drawing/2014/main" id="{3E31DCA5-F1D3-4EC7-9C21-437BB7533F90}"/>
-              </a:ext>
-            </a:extLst>
-          </p:cNvPr>
-          <p:cNvSpPr>
-            <a:spLocks xmlns:a="http://schemas.openxmlformats.org/drawingml/2006/main" noGrp="1"/>
-          </p:cNvSpPr>
-          <p:nvPr/>
-        </p:nvSpPr>
-        <p:spPr>
-          <a:xfrm xmlns:a="http://schemas.openxmlformats.org/drawingml/2006/main">
-            <a:off x="1000125" y="2247900"/>
-            <a:ext cx="476250" cy="476250"/>
-          </a:xfrm>
-          <a:prstGeom xmlns:a="http://schemas.openxmlformats.org/drawingml/2006/main" prst="ellipse">
+                <a16:creationId xmlns:a16="http://schemas.microsoft.com/office/drawing/2014/main" id="{5C43B9DA-FEB2-4E8E-BC5C-2D3E01C14016}"/>
+              </a:ext>
+            </a:extLst>
+          </p:cNvPr>
+          <p:cNvSpPr>
+            <a:spLocks xmlns:a="http://schemas.openxmlformats.org/drawingml/2006/main" noGrp="1"/>
+          </p:cNvSpPr>
+          <p:nvPr/>
+        </p:nvSpPr>
+        <p:spPr>
+          <a:xfrm xmlns:a="http://schemas.openxmlformats.org/drawingml/2006/main">
+            <a:off x="971550" y="2124075"/>
+            <a:ext cx="38100" cy="3524250"/>
+          </a:xfrm>
+          <a:prstGeom xmlns:a="http://schemas.openxmlformats.org/drawingml/2006/main" prst="rect">
             <a:avLst/>
           </a:prstGeom>
           <a:solidFill xmlns:a="http://schemas.openxmlformats.org/drawingml/2006/main">
-            <a:srgbClr val="18324A"/>
+            <a:srgbClr val="2C6E73"/>
           </a:solidFill>
           <a:ln xmlns:a="http://schemas.openxmlformats.org/drawingml/2006/main" w="0">
-            <a:noFill/>
+            <a:solidFill>
+              <a:srgbClr val="2C6E73"/>
+            </a:solidFill>
           </a:ln>
         </p:spPr>
       </p:sp>
@@ -8297,19 +8299,19 @@
           <p:cNvPr id="12" name="">
             <a:extLst xmlns:a="http://schemas.openxmlformats.org/drawingml/2006/main">
               <a:ext uri="{FF2B5EF4-FFF2-40B4-BE49-F238E27FC236}">
-                <a16:creationId xmlns:a16="http://schemas.microsoft.com/office/drawing/2014/main" id="{9D7F1CF8-1410-4CC5-8EE0-2B703ABA92BD}"/>
-              </a:ext>
-            </a:extLst>
-          </p:cNvPr>
-          <p:cNvSpPr>
-            <a:spLocks xmlns:a="http://schemas.openxmlformats.org/drawingml/2006/main" noGrp="1"/>
-          </p:cNvSpPr>
-          <p:nvPr/>
-        </p:nvSpPr>
-        <p:spPr>
-          <a:xfrm xmlns:a="http://schemas.openxmlformats.org/drawingml/2006/main">
-            <a:off x="1000125" y="2276475"/>
-            <a:ext cx="476250" cy="419100"/>
+                <a16:creationId xmlns:a16="http://schemas.microsoft.com/office/drawing/2014/main" id="{BF5C6835-7058-41A7-B3BF-10108E1B5D9D}"/>
+              </a:ext>
+            </a:extLst>
+          </p:cNvPr>
+          <p:cNvSpPr>
+            <a:spLocks xmlns:a="http://schemas.openxmlformats.org/drawingml/2006/main" noGrp="1"/>
+          </p:cNvSpPr>
+          <p:nvPr/>
+        </p:nvSpPr>
+        <p:spPr>
+          <a:xfrm xmlns:a="http://schemas.openxmlformats.org/drawingml/2006/main">
+            <a:off x="1162050" y="2200275"/>
+            <a:ext cx="400050" cy="400050"/>
           </a:xfrm>
           <a:prstGeom xmlns:a="http://schemas.openxmlformats.org/drawingml/2006/main" prst="rect">
             <a:avLst/>
@@ -8326,9 +8328,9 @@
           <a:lstStyle xmlns:a="http://schemas.openxmlformats.org/drawingml/2006/main"/>
           <a:p xmlns:a="http://schemas.openxmlformats.org/drawingml/2006/main">
             <a:pPr algn="ctr">
-              <a:defRPr sz="1350" b="1">
-                <a:solidFill>
-                  <a:srgbClr val="FFFFFF"/>
+              <a:defRPr sz="1125" b="1">
+                <a:solidFill>
+                  <a:srgbClr val="2C6E73"/>
                 </a:solidFill>
                 <a:latin typeface="Arial"/>
                 <a:ea typeface="Arial"/>
@@ -8336,9 +8338,9 @@
               </a:defRPr>
             </a:pPr>
             <a:r>
-              <a:rPr sz="1350" b="1">
-                <a:solidFill>
-                  <a:srgbClr val="FFFFFF"/>
+              <a:rPr sz="1125" b="1">
+                <a:solidFill>
+                  <a:srgbClr val="2C6E73"/>
                 </a:solidFill>
                 <a:latin typeface="Arial"/>
                 <a:ea typeface="Arial"/>
@@ -8354,19 +8356,19 @@
           <p:cNvPr id="13" name="">
             <a:extLst xmlns:a="http://schemas.openxmlformats.org/drawingml/2006/main">
               <a:ext uri="{FF2B5EF4-FFF2-40B4-BE49-F238E27FC236}">
-                <a16:creationId xmlns:a16="http://schemas.microsoft.com/office/drawing/2014/main" id="{D7DB8EB0-1397-424C-BBF6-95C5842D95A2}"/>
-              </a:ext>
-            </a:extLst>
-          </p:cNvPr>
-          <p:cNvSpPr>
-            <a:spLocks xmlns:a="http://schemas.openxmlformats.org/drawingml/2006/main" noGrp="1"/>
-          </p:cNvSpPr>
-          <p:nvPr/>
-        </p:nvSpPr>
-        <p:spPr>
-          <a:xfrm xmlns:a="http://schemas.openxmlformats.org/drawingml/2006/main">
-            <a:off x="1714500" y="2181225"/>
-            <a:ext cx="9429750" cy="609600"/>
+                <a16:creationId xmlns:a16="http://schemas.microsoft.com/office/drawing/2014/main" id="{E5D4FF66-1726-4FB0-A843-36247CBC62E7}"/>
+              </a:ext>
+            </a:extLst>
+          </p:cNvPr>
+          <p:cNvSpPr>
+            <a:spLocks xmlns:a="http://schemas.openxmlformats.org/drawingml/2006/main" noGrp="1"/>
+          </p:cNvSpPr>
+          <p:nvPr/>
+        </p:nvSpPr>
+        <p:spPr>
+          <a:xfrm xmlns:a="http://schemas.openxmlformats.org/drawingml/2006/main">
+            <a:off x="1714500" y="2114550"/>
+            <a:ext cx="9525000" cy="809625"/>
           </a:xfrm>
           <a:prstGeom xmlns:a="http://schemas.openxmlformats.org/drawingml/2006/main" prst="rect">
             <a:avLst/>
@@ -8383,7 +8385,7 @@
           <a:lstStyle xmlns:a="http://schemas.openxmlformats.org/drawingml/2006/main"/>
           <a:p xmlns:a="http://schemas.openxmlformats.org/drawingml/2006/main">
             <a:pPr algn="l">
-              <a:defRPr sz="1500" b="0">
+              <a:defRPr sz="1725" b="0">
                 <a:solidFill>
                   <a:srgbClr val="17253A"/>
                 </a:solidFill>
@@ -8393,7 +8395,7 @@
               </a:defRPr>
             </a:pPr>
             <a:r>
-              <a:rPr sz="1500" b="0">
+              <a:rPr sz="1725" b="0">
                 <a:solidFill>
                   <a:srgbClr val="17253A"/>
                 </a:solidFill>
@@ -8401,7 +8403,7 @@
                 <a:ea typeface="Arial"/>
                 <a:cs typeface="Arial"/>
               </a:rPr>
-              <a:t>Identify the structure: Read the title, labels, scale and total before calculating.</a:t>
+              <a:t>Quarter of 240 pupils</a:t>
             </a:r>
           </a:p>
         </p:txBody>
@@ -8411,28 +8413,30 @@
           <p:cNvPr id="14" name="">
             <a:extLst xmlns:a="http://schemas.openxmlformats.org/drawingml/2006/main">
               <a:ext uri="{FF2B5EF4-FFF2-40B4-BE49-F238E27FC236}">
-                <a16:creationId xmlns:a16="http://schemas.microsoft.com/office/drawing/2014/main" id="{AFCC9EC2-E64F-4FE1-8BCC-5EA978C9E263}"/>
-              </a:ext>
-            </a:extLst>
-          </p:cNvPr>
-          <p:cNvSpPr>
-            <a:spLocks xmlns:a="http://schemas.openxmlformats.org/drawingml/2006/main" noGrp="1"/>
-          </p:cNvSpPr>
-          <p:nvPr/>
-        </p:nvSpPr>
-        <p:spPr>
-          <a:xfrm xmlns:a="http://schemas.openxmlformats.org/drawingml/2006/main">
-            <a:off x="1000125" y="2990850"/>
-            <a:ext cx="476250" cy="476250"/>
-          </a:xfrm>
-          <a:prstGeom xmlns:a="http://schemas.openxmlformats.org/drawingml/2006/main" prst="ellipse">
+                <a16:creationId xmlns:a16="http://schemas.microsoft.com/office/drawing/2014/main" id="{83A576AB-DEF9-468C-B0BC-BC99350CF067}"/>
+              </a:ext>
+            </a:extLst>
+          </p:cNvPr>
+          <p:cNvSpPr>
+            <a:spLocks xmlns:a="http://schemas.openxmlformats.org/drawingml/2006/main" noGrp="1"/>
+          </p:cNvSpPr>
+          <p:nvPr/>
+        </p:nvSpPr>
+        <p:spPr>
+          <a:xfrm xmlns:a="http://schemas.openxmlformats.org/drawingml/2006/main">
+            <a:off x="1714500" y="2943225"/>
+            <a:ext cx="9334500" cy="9525"/>
+          </a:xfrm>
+          <a:prstGeom xmlns:a="http://schemas.openxmlformats.org/drawingml/2006/main" prst="rect">
             <a:avLst/>
           </a:prstGeom>
           <a:solidFill xmlns:a="http://schemas.openxmlformats.org/drawingml/2006/main">
-            <a:srgbClr val="2C6E73"/>
+            <a:srgbClr val="D9E0E6"/>
           </a:solidFill>
           <a:ln xmlns:a="http://schemas.openxmlformats.org/drawingml/2006/main" w="0">
-            <a:noFill/>
+            <a:solidFill>
+              <a:srgbClr val="D9E0E6"/>
+            </a:solidFill>
           </a:ln>
         </p:spPr>
       </p:sp>
@@ -8441,19 +8445,19 @@
           <p:cNvPr id="15" name="">
             <a:extLst xmlns:a="http://schemas.openxmlformats.org/drawingml/2006/main">
               <a:ext uri="{FF2B5EF4-FFF2-40B4-BE49-F238E27FC236}">
-                <a16:creationId xmlns:a16="http://schemas.microsoft.com/office/drawing/2014/main" id="{5A6E039D-FAB3-40CA-9A99-2DE674C4E270}"/>
-              </a:ext>
-            </a:extLst>
-          </p:cNvPr>
-          <p:cNvSpPr>
-            <a:spLocks xmlns:a="http://schemas.openxmlformats.org/drawingml/2006/main" noGrp="1"/>
-          </p:cNvSpPr>
-          <p:nvPr/>
-        </p:nvSpPr>
-        <p:spPr>
-          <a:xfrm xmlns:a="http://schemas.openxmlformats.org/drawingml/2006/main">
-            <a:off x="1000125" y="3019425"/>
-            <a:ext cx="476250" cy="419100"/>
+                <a16:creationId xmlns:a16="http://schemas.microsoft.com/office/drawing/2014/main" id="{4DBA92C6-B9A3-4A1A-9A74-FA0D065ABDDE}"/>
+              </a:ext>
+            </a:extLst>
+          </p:cNvPr>
+          <p:cNvSpPr>
+            <a:spLocks xmlns:a="http://schemas.openxmlformats.org/drawingml/2006/main" noGrp="1"/>
+          </p:cNvSpPr>
+          <p:nvPr/>
+        </p:nvSpPr>
+        <p:spPr>
+          <a:xfrm xmlns:a="http://schemas.openxmlformats.org/drawingml/2006/main">
+            <a:off x="1162050" y="3076575"/>
+            <a:ext cx="400050" cy="400050"/>
           </a:xfrm>
           <a:prstGeom xmlns:a="http://schemas.openxmlformats.org/drawingml/2006/main" prst="rect">
             <a:avLst/>
@@ -8470,9 +8474,9 @@
           <a:lstStyle xmlns:a="http://schemas.openxmlformats.org/drawingml/2006/main"/>
           <a:p xmlns:a="http://schemas.openxmlformats.org/drawingml/2006/main">
             <a:pPr algn="ctr">
-              <a:defRPr sz="1350" b="1">
-                <a:solidFill>
-                  <a:srgbClr val="FFFFFF"/>
+              <a:defRPr sz="1125" b="1">
+                <a:solidFill>
+                  <a:srgbClr val="2C6E73"/>
                 </a:solidFill>
                 <a:latin typeface="Arial"/>
                 <a:ea typeface="Arial"/>
@@ -8480,9 +8484,9 @@
               </a:defRPr>
             </a:pPr>
             <a:r>
-              <a:rPr sz="1350" b="1">
-                <a:solidFill>
-                  <a:srgbClr val="FFFFFF"/>
+              <a:rPr sz="1125" b="1">
+                <a:solidFill>
+                  <a:srgbClr val="2C6E73"/>
                 </a:solidFill>
                 <a:latin typeface="Arial"/>
                 <a:ea typeface="Arial"/>
@@ -8498,19 +8502,19 @@
           <p:cNvPr id="16" name="">
             <a:extLst xmlns:a="http://schemas.openxmlformats.org/drawingml/2006/main">
               <a:ext uri="{FF2B5EF4-FFF2-40B4-BE49-F238E27FC236}">
-                <a16:creationId xmlns:a16="http://schemas.microsoft.com/office/drawing/2014/main" id="{7F414421-B7A6-4F71-8F09-5E6868951873}"/>
-              </a:ext>
-            </a:extLst>
-          </p:cNvPr>
-          <p:cNvSpPr>
-            <a:spLocks xmlns:a="http://schemas.openxmlformats.org/drawingml/2006/main" noGrp="1"/>
-          </p:cNvSpPr>
-          <p:nvPr/>
-        </p:nvSpPr>
-        <p:spPr>
-          <a:xfrm xmlns:a="http://schemas.openxmlformats.org/drawingml/2006/main">
-            <a:off x="1714500" y="2924175"/>
-            <a:ext cx="9429750" cy="609600"/>
+                <a16:creationId xmlns:a16="http://schemas.microsoft.com/office/drawing/2014/main" id="{161C49C8-2984-4594-ABD1-879208E14539}"/>
+              </a:ext>
+            </a:extLst>
+          </p:cNvPr>
+          <p:cNvSpPr>
+            <a:spLocks xmlns:a="http://schemas.openxmlformats.org/drawingml/2006/main" noGrp="1"/>
+          </p:cNvSpPr>
+          <p:nvPr/>
+        </p:nvSpPr>
+        <p:spPr>
+          <a:xfrm xmlns:a="http://schemas.openxmlformats.org/drawingml/2006/main">
+            <a:off x="1714500" y="2990850"/>
+            <a:ext cx="9525000" cy="809625"/>
           </a:xfrm>
           <a:prstGeom xmlns:a="http://schemas.openxmlformats.org/drawingml/2006/main" prst="rect">
             <a:avLst/>
@@ -8527,7 +8531,7 @@
           <a:lstStyle xmlns:a="http://schemas.openxmlformats.org/drawingml/2006/main"/>
           <a:p xmlns:a="http://schemas.openxmlformats.org/drawingml/2006/main">
             <a:pPr algn="l">
-              <a:defRPr sz="1500" b="0">
+              <a:defRPr sz="1725" b="0">
                 <a:solidFill>
                   <a:srgbClr val="17253A"/>
                 </a:solidFill>
@@ -8537,7 +8541,7 @@
               </a:defRPr>
             </a:pPr>
             <a:r>
-              <a:rPr sz="1500" b="0">
+              <a:rPr sz="1725" b="0">
                 <a:solidFill>
                   <a:srgbClr val="17253A"/>
                 </a:solidFill>
@@ -8545,7 +8549,7 @@
                 <a:ea typeface="Arial"/>
                 <a:cs typeface="Arial"/>
               </a:rPr>
-              <a:t>Set up the method: Use proportional reasoning or add then divide for the mean.</a:t>
+              <a:t>1/4 × 240</a:t>
             </a:r>
           </a:p>
         </p:txBody>
@@ -8555,28 +8559,30 @@
           <p:cNvPr id="17" name="">
             <a:extLst xmlns:a="http://schemas.openxmlformats.org/drawingml/2006/main">
               <a:ext uri="{FF2B5EF4-FFF2-40B4-BE49-F238E27FC236}">
-                <a16:creationId xmlns:a16="http://schemas.microsoft.com/office/drawing/2014/main" id="{D262C480-E5F9-4309-BEFE-40B53EF0547F}"/>
-              </a:ext>
-            </a:extLst>
-          </p:cNvPr>
-          <p:cNvSpPr>
-            <a:spLocks xmlns:a="http://schemas.openxmlformats.org/drawingml/2006/main" noGrp="1"/>
-          </p:cNvSpPr>
-          <p:nvPr/>
-        </p:nvSpPr>
-        <p:spPr>
-          <a:xfrm xmlns:a="http://schemas.openxmlformats.org/drawingml/2006/main">
-            <a:off x="1000125" y="3733800"/>
-            <a:ext cx="476250" cy="476250"/>
-          </a:xfrm>
-          <a:prstGeom xmlns:a="http://schemas.openxmlformats.org/drawingml/2006/main" prst="ellipse">
+                <a16:creationId xmlns:a16="http://schemas.microsoft.com/office/drawing/2014/main" id="{B22C6681-C9DC-45CB-B9EE-3D741AA0E49A}"/>
+              </a:ext>
+            </a:extLst>
+          </p:cNvPr>
+          <p:cNvSpPr>
+            <a:spLocks xmlns:a="http://schemas.openxmlformats.org/drawingml/2006/main" noGrp="1"/>
+          </p:cNvSpPr>
+          <p:nvPr/>
+        </p:nvSpPr>
+        <p:spPr>
+          <a:xfrm xmlns:a="http://schemas.openxmlformats.org/drawingml/2006/main">
+            <a:off x="1714500" y="3819525"/>
+            <a:ext cx="9334500" cy="9525"/>
+          </a:xfrm>
+          <a:prstGeom xmlns:a="http://schemas.openxmlformats.org/drawingml/2006/main" prst="rect">
             <a:avLst/>
           </a:prstGeom>
           <a:solidFill xmlns:a="http://schemas.openxmlformats.org/drawingml/2006/main">
-            <a:srgbClr val="2C6E73"/>
+            <a:srgbClr val="D9E0E6"/>
           </a:solidFill>
           <a:ln xmlns:a="http://schemas.openxmlformats.org/drawingml/2006/main" w="0">
-            <a:noFill/>
+            <a:solidFill>
+              <a:srgbClr val="D9E0E6"/>
+            </a:solidFill>
           </a:ln>
         </p:spPr>
       </p:sp>
@@ -8585,19 +8591,19 @@
           <p:cNvPr id="18" name="">
             <a:extLst xmlns:a="http://schemas.openxmlformats.org/drawingml/2006/main">
               <a:ext uri="{FF2B5EF4-FFF2-40B4-BE49-F238E27FC236}">
-                <a16:creationId xmlns:a16="http://schemas.microsoft.com/office/drawing/2014/main" id="{6DE61605-192F-4A05-A75D-18BBF870E2DF}"/>
-              </a:ext>
-            </a:extLst>
-          </p:cNvPr>
-          <p:cNvSpPr>
-            <a:spLocks xmlns:a="http://schemas.openxmlformats.org/drawingml/2006/main" noGrp="1"/>
-          </p:cNvSpPr>
-          <p:nvPr/>
-        </p:nvSpPr>
-        <p:spPr>
-          <a:xfrm xmlns:a="http://schemas.openxmlformats.org/drawingml/2006/main">
-            <a:off x="1000125" y="3762375"/>
-            <a:ext cx="476250" cy="419100"/>
+                <a16:creationId xmlns:a16="http://schemas.microsoft.com/office/drawing/2014/main" id="{A4F5097C-EBF6-4353-9045-7898988A323F}"/>
+              </a:ext>
+            </a:extLst>
+          </p:cNvPr>
+          <p:cNvSpPr>
+            <a:spLocks xmlns:a="http://schemas.openxmlformats.org/drawingml/2006/main" noGrp="1"/>
+          </p:cNvSpPr>
+          <p:nvPr/>
+        </p:nvSpPr>
+        <p:spPr>
+          <a:xfrm xmlns:a="http://schemas.openxmlformats.org/drawingml/2006/main">
+            <a:off x="1162050" y="3952875"/>
+            <a:ext cx="400050" cy="400050"/>
           </a:xfrm>
           <a:prstGeom xmlns:a="http://schemas.openxmlformats.org/drawingml/2006/main" prst="rect">
             <a:avLst/>
@@ -8614,9 +8620,9 @@
           <a:lstStyle xmlns:a="http://schemas.openxmlformats.org/drawingml/2006/main"/>
           <a:p xmlns:a="http://schemas.openxmlformats.org/drawingml/2006/main">
             <a:pPr algn="ctr">
-              <a:defRPr sz="1350" b="1">
-                <a:solidFill>
-                  <a:srgbClr val="FFFFFF"/>
+              <a:defRPr sz="1125" b="1">
+                <a:solidFill>
+                  <a:srgbClr val="2C6E73"/>
                 </a:solidFill>
                 <a:latin typeface="Arial"/>
                 <a:ea typeface="Arial"/>
@@ -8624,9 +8630,9 @@
               </a:defRPr>
             </a:pPr>
             <a:r>
-              <a:rPr sz="1350" b="1">
-                <a:solidFill>
-                  <a:srgbClr val="FFFFFF"/>
+              <a:rPr sz="1125" b="1">
+                <a:solidFill>
+                  <a:srgbClr val="2C6E73"/>
                 </a:solidFill>
                 <a:latin typeface="Arial"/>
                 <a:ea typeface="Arial"/>
@@ -8642,19 +8648,19 @@
           <p:cNvPr id="19" name="">
             <a:extLst xmlns:a="http://schemas.openxmlformats.org/drawingml/2006/main">
               <a:ext uri="{FF2B5EF4-FFF2-40B4-BE49-F238E27FC236}">
-                <a16:creationId xmlns:a16="http://schemas.microsoft.com/office/drawing/2014/main" id="{0BEAAAB9-2054-49DC-B027-1CF9ABCB7B47}"/>
-              </a:ext>
-            </a:extLst>
-          </p:cNvPr>
-          <p:cNvSpPr>
-            <a:spLocks xmlns:a="http://schemas.openxmlformats.org/drawingml/2006/main" noGrp="1"/>
-          </p:cNvSpPr>
-          <p:nvPr/>
-        </p:nvSpPr>
-        <p:spPr>
-          <a:xfrm xmlns:a="http://schemas.openxmlformats.org/drawingml/2006/main">
-            <a:off x="1714500" y="3667125"/>
-            <a:ext cx="9429750" cy="609600"/>
+                <a16:creationId xmlns:a16="http://schemas.microsoft.com/office/drawing/2014/main" id="{DF66356D-0AB9-43DD-B273-77D356E09D9E}"/>
+              </a:ext>
+            </a:extLst>
+          </p:cNvPr>
+          <p:cNvSpPr>
+            <a:spLocks xmlns:a="http://schemas.openxmlformats.org/drawingml/2006/main" noGrp="1"/>
+          </p:cNvSpPr>
+          <p:nvPr/>
+        </p:nvSpPr>
+        <p:spPr>
+          <a:xfrm xmlns:a="http://schemas.openxmlformats.org/drawingml/2006/main">
+            <a:off x="1714500" y="3867150"/>
+            <a:ext cx="9525000" cy="809625"/>
           </a:xfrm>
           <a:prstGeom xmlns:a="http://schemas.openxmlformats.org/drawingml/2006/main" prst="rect">
             <a:avLst/>
@@ -8671,7 +8677,7 @@
           <a:lstStyle xmlns:a="http://schemas.openxmlformats.org/drawingml/2006/main"/>
           <a:p xmlns:a="http://schemas.openxmlformats.org/drawingml/2006/main">
             <a:pPr algn="l">
-              <a:defRPr sz="1500" b="0">
+              <a:defRPr sz="1725" b="0">
                 <a:solidFill>
                   <a:srgbClr val="17253A"/>
                 </a:solidFill>
@@ -8681,7 +8687,7 @@
               </a:defRPr>
             </a:pPr>
             <a:r>
-              <a:rPr sz="1500" b="0">
+              <a:rPr sz="1725" b="0">
                 <a:solidFill>
                   <a:srgbClr val="17253A"/>
                 </a:solidFill>
@@ -8689,7 +8695,7 @@
                 <a:ea typeface="Arial"/>
                 <a:cs typeface="Arial"/>
               </a:rPr>
-              <a:t>Complete the calculation: 60 pupils.</a:t>
+              <a:t>240 ÷ 4</a:t>
             </a:r>
           </a:p>
         </p:txBody>
@@ -8699,28 +8705,30 @@
           <p:cNvPr id="20" name="">
             <a:extLst xmlns:a="http://schemas.openxmlformats.org/drawingml/2006/main">
               <a:ext uri="{FF2B5EF4-FFF2-40B4-BE49-F238E27FC236}">
-                <a16:creationId xmlns:a16="http://schemas.microsoft.com/office/drawing/2014/main" id="{9C94A961-64B0-4BF3-B606-DF2804CDCDB6}"/>
-              </a:ext>
-            </a:extLst>
-          </p:cNvPr>
-          <p:cNvSpPr>
-            <a:spLocks xmlns:a="http://schemas.openxmlformats.org/drawingml/2006/main" noGrp="1"/>
-          </p:cNvSpPr>
-          <p:nvPr/>
-        </p:nvSpPr>
-        <p:spPr>
-          <a:xfrm xmlns:a="http://schemas.openxmlformats.org/drawingml/2006/main">
-            <a:off x="1000125" y="4476750"/>
-            <a:ext cx="476250" cy="476250"/>
-          </a:xfrm>
-          <a:prstGeom xmlns:a="http://schemas.openxmlformats.org/drawingml/2006/main" prst="ellipse">
+                <a16:creationId xmlns:a16="http://schemas.microsoft.com/office/drawing/2014/main" id="{873EB088-D13D-4E20-B882-DA3F8F2853EB}"/>
+              </a:ext>
+            </a:extLst>
+          </p:cNvPr>
+          <p:cNvSpPr>
+            <a:spLocks xmlns:a="http://schemas.openxmlformats.org/drawingml/2006/main" noGrp="1"/>
+          </p:cNvSpPr>
+          <p:nvPr/>
+        </p:nvSpPr>
+        <p:spPr>
+          <a:xfrm xmlns:a="http://schemas.openxmlformats.org/drawingml/2006/main">
+            <a:off x="1714500" y="4695825"/>
+            <a:ext cx="9334500" cy="9525"/>
+          </a:xfrm>
+          <a:prstGeom xmlns:a="http://schemas.openxmlformats.org/drawingml/2006/main" prst="rect">
             <a:avLst/>
           </a:prstGeom>
           <a:solidFill xmlns:a="http://schemas.openxmlformats.org/drawingml/2006/main">
-            <a:srgbClr val="2C6E73"/>
+            <a:srgbClr val="D9E0E6"/>
           </a:solidFill>
           <a:ln xmlns:a="http://schemas.openxmlformats.org/drawingml/2006/main" w="0">
-            <a:noFill/>
+            <a:solidFill>
+              <a:srgbClr val="D9E0E6"/>
+            </a:solidFill>
           </a:ln>
         </p:spPr>
       </p:sp>
@@ -8729,19 +8737,19 @@
           <p:cNvPr id="21" name="">
             <a:extLst xmlns:a="http://schemas.openxmlformats.org/drawingml/2006/main">
               <a:ext uri="{FF2B5EF4-FFF2-40B4-BE49-F238E27FC236}">
-                <a16:creationId xmlns:a16="http://schemas.microsoft.com/office/drawing/2014/main" id="{D2A273B1-9417-4F1F-95B8-9E4FEB76ECC8}"/>
-              </a:ext>
-            </a:extLst>
-          </p:cNvPr>
-          <p:cNvSpPr>
-            <a:spLocks xmlns:a="http://schemas.openxmlformats.org/drawingml/2006/main" noGrp="1"/>
-          </p:cNvSpPr>
-          <p:nvPr/>
-        </p:nvSpPr>
-        <p:spPr>
-          <a:xfrm xmlns:a="http://schemas.openxmlformats.org/drawingml/2006/main">
-            <a:off x="1000125" y="4505325"/>
-            <a:ext cx="476250" cy="419100"/>
+                <a16:creationId xmlns:a16="http://schemas.microsoft.com/office/drawing/2014/main" id="{F2C4BFDF-7DD2-4918-A1CE-9D15AF6B5D63}"/>
+              </a:ext>
+            </a:extLst>
+          </p:cNvPr>
+          <p:cNvSpPr>
+            <a:spLocks xmlns:a="http://schemas.openxmlformats.org/drawingml/2006/main" noGrp="1"/>
+          </p:cNvSpPr>
+          <p:nvPr/>
+        </p:nvSpPr>
+        <p:spPr>
+          <a:xfrm xmlns:a="http://schemas.openxmlformats.org/drawingml/2006/main">
+            <a:off x="1162050" y="4829175"/>
+            <a:ext cx="400050" cy="400050"/>
           </a:xfrm>
           <a:prstGeom xmlns:a="http://schemas.openxmlformats.org/drawingml/2006/main" prst="rect">
             <a:avLst/>
@@ -8758,9 +8766,9 @@
           <a:lstStyle xmlns:a="http://schemas.openxmlformats.org/drawingml/2006/main"/>
           <a:p xmlns:a="http://schemas.openxmlformats.org/drawingml/2006/main">
             <a:pPr algn="ctr">
-              <a:defRPr sz="1350" b="1">
-                <a:solidFill>
-                  <a:srgbClr val="FFFFFF"/>
+              <a:defRPr sz="1125" b="1">
+                <a:solidFill>
+                  <a:srgbClr val="2F785D"/>
                 </a:solidFill>
                 <a:latin typeface="Arial"/>
                 <a:ea typeface="Arial"/>
@@ -8768,9 +8776,9 @@
               </a:defRPr>
             </a:pPr>
             <a:r>
-              <a:rPr sz="1350" b="1">
-                <a:solidFill>
-                  <a:srgbClr val="FFFFFF"/>
+              <a:rPr sz="1125" b="1">
+                <a:solidFill>
+                  <a:srgbClr val="2F785D"/>
                 </a:solidFill>
                 <a:latin typeface="Arial"/>
                 <a:ea typeface="Arial"/>
@@ -8786,19 +8794,19 @@
           <p:cNvPr id="22" name="">
             <a:extLst xmlns:a="http://schemas.openxmlformats.org/drawingml/2006/main">
               <a:ext uri="{FF2B5EF4-FFF2-40B4-BE49-F238E27FC236}">
-                <a16:creationId xmlns:a16="http://schemas.microsoft.com/office/drawing/2014/main" id="{76122551-44EA-4CDB-84D6-FDCD173E6D84}"/>
-              </a:ext>
-            </a:extLst>
-          </p:cNvPr>
-          <p:cNvSpPr>
-            <a:spLocks xmlns:a="http://schemas.openxmlformats.org/drawingml/2006/main" noGrp="1"/>
-          </p:cNvSpPr>
-          <p:nvPr/>
-        </p:nvSpPr>
-        <p:spPr>
-          <a:xfrm xmlns:a="http://schemas.openxmlformats.org/drawingml/2006/main">
-            <a:off x="1714500" y="4410075"/>
-            <a:ext cx="9429750" cy="609600"/>
+                <a16:creationId xmlns:a16="http://schemas.microsoft.com/office/drawing/2014/main" id="{600FEEA1-4C57-45BF-9368-1DFA33B39429}"/>
+              </a:ext>
+            </a:extLst>
+          </p:cNvPr>
+          <p:cNvSpPr>
+            <a:spLocks xmlns:a="http://schemas.openxmlformats.org/drawingml/2006/main" noGrp="1"/>
+          </p:cNvSpPr>
+          <p:nvPr/>
+        </p:nvSpPr>
+        <p:spPr>
+          <a:xfrm xmlns:a="http://schemas.openxmlformats.org/drawingml/2006/main">
+            <a:off x="1714500" y="4743450"/>
+            <a:ext cx="9525000" cy="809625"/>
           </a:xfrm>
           <a:prstGeom xmlns:a="http://schemas.openxmlformats.org/drawingml/2006/main" prst="rect">
             <a:avLst/>
@@ -8815,7 +8823,7 @@
           <a:lstStyle xmlns:a="http://schemas.openxmlformats.org/drawingml/2006/main"/>
           <a:p xmlns:a="http://schemas.openxmlformats.org/drawingml/2006/main">
             <a:pPr algn="l">
-              <a:defRPr sz="1500" b="1">
+              <a:defRPr sz="1725" b="1">
                 <a:solidFill>
                   <a:srgbClr val="2F785D"/>
                 </a:solidFill>
@@ -8825,7 +8833,7 @@
               </a:defRPr>
             </a:pPr>
             <a:r>
-              <a:rPr sz="1500" b="1">
+              <a:rPr sz="1725" b="1">
                 <a:solidFill>
                   <a:srgbClr val="2F785D"/>
                 </a:solidFill>
@@ -8833,7 +8841,7 @@
                 <a:ea typeface="Arial"/>
                 <a:cs typeface="Arial"/>
               </a:rPr>
-              <a:t>Check the result: State the answer in context and check it against the data range.</a:t>
+              <a:t>60 pupils</a:t>
             </a:r>
           </a:p>
         </p:txBody>
@@ -8841,7 +8849,7 @@
     </p:spTree>
     <p:extLst>
       <p:ext uri="{BB962C8B-B14F-4D97-AF65-F5344CB8AC3E}">
-        <p14:creationId xmlns:p14="http://schemas.microsoft.com/office/powerpoint/2010/main" val="2109934422"/>
+        <p14:creationId xmlns:p14="http://schemas.microsoft.com/office/powerpoint/2010/main" val="2004617932"/>
       </p:ext>
     </p:extLst>
   </p:cSld>
@@ -9134,7 +9142,7 @@
           <p:cNvPr id="15" name="">
             <a:extLst xmlns:a="http://schemas.openxmlformats.org/drawingml/2006/main">
               <a:ext uri="{FF2B5EF4-FFF2-40B4-BE49-F238E27FC236}">
-                <a16:creationId xmlns:a16="http://schemas.microsoft.com/office/drawing/2014/main" id="{353DB456-7F4F-4A9D-8CD1-FD3C8BDA2209}"/>
+                <a16:creationId xmlns:a16="http://schemas.microsoft.com/office/drawing/2014/main" id="{90723509-94B7-4ACA-81E3-E94A50B6288C}"/>
               </a:ext>
             </a:extLst>
           </p:cNvPr>
@@ -9166,7 +9174,7 @@
           <p:cNvPr id="2" name="">
             <a:extLst xmlns:a="http://schemas.openxmlformats.org/drawingml/2006/main">
               <a:ext uri="{FF2B5EF4-FFF2-40B4-BE49-F238E27FC236}">
-                <a16:creationId xmlns:a16="http://schemas.microsoft.com/office/drawing/2014/main" id="{61FEA7E4-9C83-47D1-8323-B02F2EB69D01}"/>
+                <a16:creationId xmlns:a16="http://schemas.microsoft.com/office/drawing/2014/main" id="{DABD79AD-9BC7-4EF4-93CC-38392A39DE4F}"/>
               </a:ext>
             </a:extLst>
           </p:cNvPr>
@@ -9223,7 +9231,7 @@
           <p:cNvPr id="3" name="">
             <a:extLst xmlns:a="http://schemas.openxmlformats.org/drawingml/2006/main">
               <a:ext uri="{FF2B5EF4-FFF2-40B4-BE49-F238E27FC236}">
-                <a16:creationId xmlns:a16="http://schemas.microsoft.com/office/drawing/2014/main" id="{1AEFEBD3-0900-4EB4-A64C-EFD5DF2C040D}"/>
+                <a16:creationId xmlns:a16="http://schemas.microsoft.com/office/drawing/2014/main" id="{6D44F4FE-8569-4654-B769-0007EDC3CE79}"/>
               </a:ext>
             </a:extLst>
           </p:cNvPr>
@@ -9255,7 +9263,7 @@
           <p:cNvPr id="4" name="">
             <a:extLst xmlns:a="http://schemas.openxmlformats.org/drawingml/2006/main">
               <a:ext uri="{FF2B5EF4-FFF2-40B4-BE49-F238E27FC236}">
-                <a16:creationId xmlns:a16="http://schemas.microsoft.com/office/drawing/2014/main" id="{4336E4E0-A3F9-47A1-9909-6E5F946E879D}"/>
+                <a16:creationId xmlns:a16="http://schemas.microsoft.com/office/drawing/2014/main" id="{D35BEF98-53E0-494A-8EC7-B4F30A9D545A}"/>
               </a:ext>
             </a:extLst>
           </p:cNvPr>
@@ -9312,7 +9320,7 @@
           <p:cNvPr id="5" name="">
             <a:extLst xmlns:a="http://schemas.openxmlformats.org/drawingml/2006/main">
               <a:ext uri="{FF2B5EF4-FFF2-40B4-BE49-F238E27FC236}">
-                <a16:creationId xmlns:a16="http://schemas.microsoft.com/office/drawing/2014/main" id="{898C7FD5-EA0F-4F19-AC88-4A232492602A}"/>
+                <a16:creationId xmlns:a16="http://schemas.microsoft.com/office/drawing/2014/main" id="{E8D94AD4-0326-4A10-8B6B-A042C7F48CA5}"/>
               </a:ext>
             </a:extLst>
           </p:cNvPr>
@@ -9369,7 +9377,7 @@
           <p:cNvPr id="6" name="">
             <a:extLst xmlns:a="http://schemas.openxmlformats.org/drawingml/2006/main">
               <a:ext uri="{FF2B5EF4-FFF2-40B4-BE49-F238E27FC236}">
-                <a16:creationId xmlns:a16="http://schemas.microsoft.com/office/drawing/2014/main" id="{F4B9CF60-E75B-49D8-81A7-B06591241035}"/>
+                <a16:creationId xmlns:a16="http://schemas.microsoft.com/office/drawing/2014/main" id="{76633A76-3725-43A2-92D1-C9A0B26C5E4B}"/>
               </a:ext>
             </a:extLst>
           </p:cNvPr>
@@ -9426,7 +9434,7 @@
           <p:cNvPr id="7" name="">
             <a:extLst xmlns:a="http://schemas.openxmlformats.org/drawingml/2006/main">
               <a:ext uri="{FF2B5EF4-FFF2-40B4-BE49-F238E27FC236}">
-                <a16:creationId xmlns:a16="http://schemas.microsoft.com/office/drawing/2014/main" id="{DB3BDEE0-9DA7-4673-8494-8D6AB728EBCC}"/>
+                <a16:creationId xmlns:a16="http://schemas.microsoft.com/office/drawing/2014/main" id="{4493ED37-C32E-4D9A-961C-ECC753C046C6}"/>
               </a:ext>
             </a:extLst>
           </p:cNvPr>
@@ -9458,7 +9466,7 @@
           <p:cNvPr id="8" name="">
             <a:extLst xmlns:a="http://schemas.openxmlformats.org/drawingml/2006/main">
               <a:ext uri="{FF2B5EF4-FFF2-40B4-BE49-F238E27FC236}">
-                <a16:creationId xmlns:a16="http://schemas.microsoft.com/office/drawing/2014/main" id="{58252593-D0FE-4C0E-A526-D60C36C23BE6}"/>
+                <a16:creationId xmlns:a16="http://schemas.microsoft.com/office/drawing/2014/main" id="{0BC24967-C59F-46E5-B844-7D2662841980}"/>
               </a:ext>
             </a:extLst>
           </p:cNvPr>
@@ -9515,7 +9523,7 @@
           <p:cNvPr id="9" name="">
             <a:extLst xmlns:a="http://schemas.openxmlformats.org/drawingml/2006/main">
               <a:ext uri="{FF2B5EF4-FFF2-40B4-BE49-F238E27FC236}">
-                <a16:creationId xmlns:a16="http://schemas.microsoft.com/office/drawing/2014/main" id="{E7A93FE1-A1A3-44BC-9DE1-298697325C6E}"/>
+                <a16:creationId xmlns:a16="http://schemas.microsoft.com/office/drawing/2014/main" id="{7097412C-4ABE-40EE-9F5C-2788CC251E44}"/>
               </a:ext>
             </a:extLst>
           </p:cNvPr>
@@ -9572,7 +9580,7 @@
           <p:cNvPr id="10" name="">
             <a:extLst xmlns:a="http://schemas.openxmlformats.org/drawingml/2006/main">
               <a:ext uri="{FF2B5EF4-FFF2-40B4-BE49-F238E27FC236}">
-                <a16:creationId xmlns:a16="http://schemas.microsoft.com/office/drawing/2014/main" id="{21D42C9C-4397-46C5-9E11-8A8010783024}"/>
+                <a16:creationId xmlns:a16="http://schemas.microsoft.com/office/drawing/2014/main" id="{7DF3901A-A401-49AC-AE50-6FCBF8EB3FA0}"/>
               </a:ext>
             </a:extLst>
           </p:cNvPr>
@@ -9629,7 +9637,7 @@
           <p:cNvPr id="11" name="">
             <a:extLst xmlns:a="http://schemas.openxmlformats.org/drawingml/2006/main">
               <a:ext uri="{FF2B5EF4-FFF2-40B4-BE49-F238E27FC236}">
-                <a16:creationId xmlns:a16="http://schemas.microsoft.com/office/drawing/2014/main" id="{537E4ADD-3FBA-4234-8824-C0C72BD0233A}"/>
+                <a16:creationId xmlns:a16="http://schemas.microsoft.com/office/drawing/2014/main" id="{42843876-BC72-411C-9997-4DC5D4ECFAD4}"/>
               </a:ext>
             </a:extLst>
           </p:cNvPr>
@@ -9686,7 +9694,7 @@
           <p:cNvPr id="12" name="">
             <a:extLst xmlns:a="http://schemas.openxmlformats.org/drawingml/2006/main">
               <a:ext uri="{FF2B5EF4-FFF2-40B4-BE49-F238E27FC236}">
-                <a16:creationId xmlns:a16="http://schemas.microsoft.com/office/drawing/2014/main" id="{67687E21-2800-44F9-A5E3-2089E912D33C}"/>
+                <a16:creationId xmlns:a16="http://schemas.microsoft.com/office/drawing/2014/main" id="{FE04DF0C-8D59-4C23-ACDE-02C2333684F4}"/>
               </a:ext>
             </a:extLst>
           </p:cNvPr>
@@ -9718,7 +9726,7 @@
           <p:cNvPr id="13" name="">
             <a:extLst xmlns:a="http://schemas.openxmlformats.org/drawingml/2006/main">
               <a:ext uri="{FF2B5EF4-FFF2-40B4-BE49-F238E27FC236}">
-                <a16:creationId xmlns:a16="http://schemas.microsoft.com/office/drawing/2014/main" id="{940A2C3C-790D-4E37-A685-2BE1AB946697}"/>
+                <a16:creationId xmlns:a16="http://schemas.microsoft.com/office/drawing/2014/main" id="{75F990E0-EB69-4474-B3C8-404577F275EC}"/>
               </a:ext>
             </a:extLst>
           </p:cNvPr>
@@ -9775,7 +9783,7 @@
           <p:cNvPr id="14" name="">
             <a:extLst xmlns:a="http://schemas.openxmlformats.org/drawingml/2006/main">
               <a:ext uri="{FF2B5EF4-FFF2-40B4-BE49-F238E27FC236}">
-                <a16:creationId xmlns:a16="http://schemas.microsoft.com/office/drawing/2014/main" id="{283AE393-9176-4FA8-82D8-D39D177F7D9A}"/>
+                <a16:creationId xmlns:a16="http://schemas.microsoft.com/office/drawing/2014/main" id="{F4363DF2-D005-45CC-956E-EDD9F268C068}"/>
               </a:ext>
             </a:extLst>
           </p:cNvPr>
@@ -9830,7 +9838,7 @@
     </p:spTree>
     <p:extLst>
       <p:ext uri="{BB962C8B-B14F-4D97-AF65-F5344CB8AC3E}">
-        <p14:creationId xmlns:p14="http://schemas.microsoft.com/office/powerpoint/2010/main" val="671089432"/>
+        <p14:creationId xmlns:p14="http://schemas.microsoft.com/office/powerpoint/2010/main" val="650826768"/>
       </p:ext>
     </p:extLst>
   </p:cSld>
@@ -10031,7 +10039,7 @@
           <p:cNvPr id="16" name="">
             <a:extLst xmlns:a="http://schemas.openxmlformats.org/drawingml/2006/main">
               <a:ext uri="{FF2B5EF4-FFF2-40B4-BE49-F238E27FC236}">
-                <a16:creationId xmlns:a16="http://schemas.microsoft.com/office/drawing/2014/main" id="{8841694F-9713-4896-A702-F7591335D0D3}"/>
+                <a16:creationId xmlns:a16="http://schemas.microsoft.com/office/drawing/2014/main" id="{E8792156-8CF7-4346-86E2-D973C272AC3C}"/>
               </a:ext>
             </a:extLst>
           </p:cNvPr>
@@ -10063,7 +10071,7 @@
           <p:cNvPr id="2" name="">
             <a:extLst xmlns:a="http://schemas.openxmlformats.org/drawingml/2006/main">
               <a:ext uri="{FF2B5EF4-FFF2-40B4-BE49-F238E27FC236}">
-                <a16:creationId xmlns:a16="http://schemas.microsoft.com/office/drawing/2014/main" id="{217946F8-3137-426E-946D-31420AFBF9C9}"/>
+                <a16:creationId xmlns:a16="http://schemas.microsoft.com/office/drawing/2014/main" id="{A4337C6F-2F61-43F0-8740-D4B4F567B17B}"/>
               </a:ext>
             </a:extLst>
           </p:cNvPr>
@@ -10120,7 +10128,7 @@
           <p:cNvPr id="3" name="">
             <a:extLst xmlns:a="http://schemas.openxmlformats.org/drawingml/2006/main">
               <a:ext uri="{FF2B5EF4-FFF2-40B4-BE49-F238E27FC236}">
-                <a16:creationId xmlns:a16="http://schemas.microsoft.com/office/drawing/2014/main" id="{1C1B61FE-D97C-43CB-B807-29A951F45722}"/>
+                <a16:creationId xmlns:a16="http://schemas.microsoft.com/office/drawing/2014/main" id="{51059A45-6047-4DF0-97F4-D47E37401DA8}"/>
               </a:ext>
             </a:extLst>
           </p:cNvPr>
@@ -10152,7 +10160,7 @@
           <p:cNvPr id="4" name="">
             <a:extLst xmlns:a="http://schemas.openxmlformats.org/drawingml/2006/main">
               <a:ext uri="{FF2B5EF4-FFF2-40B4-BE49-F238E27FC236}">
-                <a16:creationId xmlns:a16="http://schemas.microsoft.com/office/drawing/2014/main" id="{630606EE-67F4-482A-A7CF-0BC8ADE63580}"/>
+                <a16:creationId xmlns:a16="http://schemas.microsoft.com/office/drawing/2014/main" id="{15770C98-7828-4529-B948-72468264D5AF}"/>
               </a:ext>
             </a:extLst>
           </p:cNvPr>
@@ -10209,7 +10217,7 @@
           <p:cNvPr id="5" name="">
             <a:extLst xmlns:a="http://schemas.openxmlformats.org/drawingml/2006/main">
               <a:ext uri="{FF2B5EF4-FFF2-40B4-BE49-F238E27FC236}">
-                <a16:creationId xmlns:a16="http://schemas.microsoft.com/office/drawing/2014/main" id="{45F48F01-1D3E-4623-9198-7DE3A87D57BA}"/>
+                <a16:creationId xmlns:a16="http://schemas.microsoft.com/office/drawing/2014/main" id="{413CCF62-96F2-443C-8C22-FF20C8C8E1DE}"/>
               </a:ext>
             </a:extLst>
           </p:cNvPr>
@@ -10266,7 +10274,7 @@
           <p:cNvPr id="6" name="">
             <a:extLst xmlns:a="http://schemas.openxmlformats.org/drawingml/2006/main">
               <a:ext uri="{FF2B5EF4-FFF2-40B4-BE49-F238E27FC236}">
-                <a16:creationId xmlns:a16="http://schemas.microsoft.com/office/drawing/2014/main" id="{76272591-F5B5-446E-98C3-7257AEF8D66C}"/>
+                <a16:creationId xmlns:a16="http://schemas.microsoft.com/office/drawing/2014/main" id="{367A022E-5791-4467-9CA3-1281C418428E}"/>
               </a:ext>
             </a:extLst>
           </p:cNvPr>
@@ -10323,7 +10331,7 @@
           <p:cNvPr id="7" name="">
             <a:extLst xmlns:a="http://schemas.openxmlformats.org/drawingml/2006/main">
               <a:ext uri="{FF2B5EF4-FFF2-40B4-BE49-F238E27FC236}">
-                <a16:creationId xmlns:a16="http://schemas.microsoft.com/office/drawing/2014/main" id="{C5514DFB-6AF9-4989-9270-CEC6DD286D6D}"/>
+                <a16:creationId xmlns:a16="http://schemas.microsoft.com/office/drawing/2014/main" id="{DFF0F0B6-5A8C-48E7-AE61-0939198F1BB4}"/>
               </a:ext>
             </a:extLst>
           </p:cNvPr>
@@ -10355,7 +10363,7 @@
           <p:cNvPr id="8" name="">
             <a:extLst xmlns:a="http://schemas.openxmlformats.org/drawingml/2006/main">
               <a:ext uri="{FF2B5EF4-FFF2-40B4-BE49-F238E27FC236}">
-                <a16:creationId xmlns:a16="http://schemas.microsoft.com/office/drawing/2014/main" id="{B01AF799-8140-4A1B-8DD5-33F5A80B94EA}"/>
+                <a16:creationId xmlns:a16="http://schemas.microsoft.com/office/drawing/2014/main" id="{B8FEDBF3-0B01-4A42-B9EE-2965C8760299}"/>
               </a:ext>
             </a:extLst>
           </p:cNvPr>
@@ -10412,7 +10420,7 @@
           <p:cNvPr id="9" name="">
             <a:extLst xmlns:a="http://schemas.openxmlformats.org/drawingml/2006/main">
               <a:ext uri="{FF2B5EF4-FFF2-40B4-BE49-F238E27FC236}">
-                <a16:creationId xmlns:a16="http://schemas.microsoft.com/office/drawing/2014/main" id="{D114B041-C638-4DC7-A3D0-DE14092B47C9}"/>
+                <a16:creationId xmlns:a16="http://schemas.microsoft.com/office/drawing/2014/main" id="{251A57D7-81EC-41CE-8E20-A819DD2A45CF}"/>
               </a:ext>
             </a:extLst>
           </p:cNvPr>
@@ -10469,7 +10477,7 @@
           <p:cNvPr id="10" name="">
             <a:extLst xmlns:a="http://schemas.openxmlformats.org/drawingml/2006/main">
               <a:ext uri="{FF2B5EF4-FFF2-40B4-BE49-F238E27FC236}">
-                <a16:creationId xmlns:a16="http://schemas.microsoft.com/office/drawing/2014/main" id="{8C2D9E7E-7D6B-40B2-B827-1DE3918E5443}"/>
+                <a16:creationId xmlns:a16="http://schemas.microsoft.com/office/drawing/2014/main" id="{CB2BE39D-3CAA-41B1-A3A6-FD8610D06031}"/>
               </a:ext>
             </a:extLst>
           </p:cNvPr>
@@ -10526,7 +10534,7 @@
           <p:cNvPr id="11" name="">
             <a:extLst xmlns:a="http://schemas.openxmlformats.org/drawingml/2006/main">
               <a:ext uri="{FF2B5EF4-FFF2-40B4-BE49-F238E27FC236}">
-                <a16:creationId xmlns:a16="http://schemas.microsoft.com/office/drawing/2014/main" id="{633EE0CA-7BB4-4983-98AE-329E89B57973}"/>
+                <a16:creationId xmlns:a16="http://schemas.microsoft.com/office/drawing/2014/main" id="{2A85383F-4026-4034-B4D5-29E5D5A4A2B7}"/>
               </a:ext>
             </a:extLst>
           </p:cNvPr>
@@ -10583,7 +10591,7 @@
           <p:cNvPr id="12" name="">
             <a:extLst xmlns:a="http://schemas.openxmlformats.org/drawingml/2006/main">
               <a:ext uri="{FF2B5EF4-FFF2-40B4-BE49-F238E27FC236}">
-                <a16:creationId xmlns:a16="http://schemas.microsoft.com/office/drawing/2014/main" id="{626DA320-D3E4-48D7-9130-C95B3AD8FC39}"/>
+                <a16:creationId xmlns:a16="http://schemas.microsoft.com/office/drawing/2014/main" id="{E00E3384-457F-4C40-BD98-0FA04CEFFB5D}"/>
               </a:ext>
             </a:extLst>
           </p:cNvPr>
@@ -10640,7 +10648,7 @@
           <p:cNvPr id="13" name="">
             <a:extLst xmlns:a="http://schemas.openxmlformats.org/drawingml/2006/main">
               <a:ext uri="{FF2B5EF4-FFF2-40B4-BE49-F238E27FC236}">
-                <a16:creationId xmlns:a16="http://schemas.microsoft.com/office/drawing/2014/main" id="{42C829C4-878F-4BEC-AE57-EBA832C55285}"/>
+                <a16:creationId xmlns:a16="http://schemas.microsoft.com/office/drawing/2014/main" id="{2540F316-3EB5-47D3-AB3B-6D9035CF2CD9}"/>
               </a:ext>
             </a:extLst>
           </p:cNvPr>
@@ -10697,7 +10705,7 @@
           <p:cNvPr id="14" name="">
             <a:extLst xmlns:a="http://schemas.openxmlformats.org/drawingml/2006/main">
               <a:ext uri="{FF2B5EF4-FFF2-40B4-BE49-F238E27FC236}">
-                <a16:creationId xmlns:a16="http://schemas.microsoft.com/office/drawing/2014/main" id="{1B90F028-EF1F-49CE-8843-9B08AF38CACA}"/>
+                <a16:creationId xmlns:a16="http://schemas.microsoft.com/office/drawing/2014/main" id="{F01120E8-E484-4EB9-9E3F-6D7A5939AB88}"/>
               </a:ext>
             </a:extLst>
           </p:cNvPr>
@@ -10754,7 +10762,7 @@
           <p:cNvPr id="15" name="">
             <a:extLst xmlns:a="http://schemas.openxmlformats.org/drawingml/2006/main">
               <a:ext uri="{FF2B5EF4-FFF2-40B4-BE49-F238E27FC236}">
-                <a16:creationId xmlns:a16="http://schemas.microsoft.com/office/drawing/2014/main" id="{AD6EED7A-ED8E-4D72-9CB1-7E0F05CB1968}"/>
+                <a16:creationId xmlns:a16="http://schemas.microsoft.com/office/drawing/2014/main" id="{E01FAB5D-CE1A-46A6-9328-CBBBB23999CE}"/>
               </a:ext>
             </a:extLst>
           </p:cNvPr>
@@ -10809,7 +10817,7 @@
     </p:spTree>
     <p:extLst>
       <p:ext uri="{BB962C8B-B14F-4D97-AF65-F5344CB8AC3E}">
-        <p14:creationId xmlns:p14="http://schemas.microsoft.com/office/powerpoint/2010/main" val="1035547600"/>
+        <p14:creationId xmlns:p14="http://schemas.microsoft.com/office/powerpoint/2010/main" val="733110003"/>
       </p:ext>
     </p:extLst>
   </p:cSld>
@@ -10964,7 +10972,7 @@
           <p:cNvPr id="16" name="">
             <a:extLst xmlns:a="http://schemas.openxmlformats.org/drawingml/2006/main">
               <a:ext uri="{FF2B5EF4-FFF2-40B4-BE49-F238E27FC236}">
-                <a16:creationId xmlns:a16="http://schemas.microsoft.com/office/drawing/2014/main" id="{16D0C3BE-38C3-44E4-A61A-BC63E12CB43A}"/>
+                <a16:creationId xmlns:a16="http://schemas.microsoft.com/office/drawing/2014/main" id="{204980BA-81FF-43B8-98CB-5C886670F70C}"/>
               </a:ext>
             </a:extLst>
           </p:cNvPr>
@@ -10996,7 +11004,7 @@
           <p:cNvPr id="2" name="">
             <a:extLst xmlns:a="http://schemas.openxmlformats.org/drawingml/2006/main">
               <a:ext uri="{FF2B5EF4-FFF2-40B4-BE49-F238E27FC236}">
-                <a16:creationId xmlns:a16="http://schemas.microsoft.com/office/drawing/2014/main" id="{F4E3A966-D456-4D55-BD57-077A12307165}"/>
+                <a16:creationId xmlns:a16="http://schemas.microsoft.com/office/drawing/2014/main" id="{CE0FFB95-F0A1-4831-88F1-7633033F17FB}"/>
               </a:ext>
             </a:extLst>
           </p:cNvPr>
@@ -11053,7 +11061,7 @@
           <p:cNvPr id="3" name="">
             <a:extLst xmlns:a="http://schemas.openxmlformats.org/drawingml/2006/main">
               <a:ext uri="{FF2B5EF4-FFF2-40B4-BE49-F238E27FC236}">
-                <a16:creationId xmlns:a16="http://schemas.microsoft.com/office/drawing/2014/main" id="{F4810F3E-D6E0-465A-B257-DEE954BA57FE}"/>
+                <a16:creationId xmlns:a16="http://schemas.microsoft.com/office/drawing/2014/main" id="{65AA4CAC-F729-488E-B2D7-27B09805E46A}"/>
               </a:ext>
             </a:extLst>
           </p:cNvPr>
@@ -11085,7 +11093,7 @@
           <p:cNvPr id="4" name="">
             <a:extLst xmlns:a="http://schemas.openxmlformats.org/drawingml/2006/main">
               <a:ext uri="{FF2B5EF4-FFF2-40B4-BE49-F238E27FC236}">
-                <a16:creationId xmlns:a16="http://schemas.microsoft.com/office/drawing/2014/main" id="{1AE7EA54-7B6B-4557-8978-84CF20B452BB}"/>
+                <a16:creationId xmlns:a16="http://schemas.microsoft.com/office/drawing/2014/main" id="{55A85C0A-46A4-4388-B753-A65568E99ED7}"/>
               </a:ext>
             </a:extLst>
           </p:cNvPr>
@@ -11142,7 +11150,7 @@
           <p:cNvPr id="5" name="">
             <a:extLst xmlns:a="http://schemas.openxmlformats.org/drawingml/2006/main">
               <a:ext uri="{FF2B5EF4-FFF2-40B4-BE49-F238E27FC236}">
-                <a16:creationId xmlns:a16="http://schemas.microsoft.com/office/drawing/2014/main" id="{C7B9E3E3-6F0B-4C0B-BA4F-A499EA2385D9}"/>
+                <a16:creationId xmlns:a16="http://schemas.microsoft.com/office/drawing/2014/main" id="{ED850365-3AF2-4C2A-A2C7-25BD104F4653}"/>
               </a:ext>
             </a:extLst>
           </p:cNvPr>
@@ -11199,7 +11207,7 @@
           <p:cNvPr id="6" name="">
             <a:extLst xmlns:a="http://schemas.openxmlformats.org/drawingml/2006/main">
               <a:ext uri="{FF2B5EF4-FFF2-40B4-BE49-F238E27FC236}">
-                <a16:creationId xmlns:a16="http://schemas.microsoft.com/office/drawing/2014/main" id="{E752E69E-0E82-4EFE-8958-40CA422274F4}"/>
+                <a16:creationId xmlns:a16="http://schemas.microsoft.com/office/drawing/2014/main" id="{D42B8D9E-5C7B-480A-9BA1-FE9D3C500F13}"/>
               </a:ext>
             </a:extLst>
           </p:cNvPr>
@@ -11256,7 +11264,7 @@
           <p:cNvPr id="7" name="">
             <a:extLst xmlns:a="http://schemas.openxmlformats.org/drawingml/2006/main">
               <a:ext uri="{FF2B5EF4-FFF2-40B4-BE49-F238E27FC236}">
-                <a16:creationId xmlns:a16="http://schemas.microsoft.com/office/drawing/2014/main" id="{0B667685-36EB-4310-9162-AA8BD15A9C40}"/>
+                <a16:creationId xmlns:a16="http://schemas.microsoft.com/office/drawing/2014/main" id="{F83632BA-0A17-4EA9-976E-DDE0D3653328}"/>
               </a:ext>
             </a:extLst>
           </p:cNvPr>
@@ -11288,7 +11296,7 @@
           <p:cNvPr id="8" name="">
             <a:extLst xmlns:a="http://schemas.openxmlformats.org/drawingml/2006/main">
               <a:ext uri="{FF2B5EF4-FFF2-40B4-BE49-F238E27FC236}">
-                <a16:creationId xmlns:a16="http://schemas.microsoft.com/office/drawing/2014/main" id="{CE44A5E7-5D36-4058-9535-6390C47B31EF}"/>
+                <a16:creationId xmlns:a16="http://schemas.microsoft.com/office/drawing/2014/main" id="{827CF65F-0856-4E28-A6A7-12F28DF899E8}"/>
               </a:ext>
             </a:extLst>
           </p:cNvPr>
@@ -11345,7 +11353,7 @@
           <p:cNvPr id="9" name="">
             <a:extLst xmlns:a="http://schemas.openxmlformats.org/drawingml/2006/main">
               <a:ext uri="{FF2B5EF4-FFF2-40B4-BE49-F238E27FC236}">
-                <a16:creationId xmlns:a16="http://schemas.microsoft.com/office/drawing/2014/main" id="{0980017F-1738-409B-A426-6828430CDB80}"/>
+                <a16:creationId xmlns:a16="http://schemas.microsoft.com/office/drawing/2014/main" id="{D1F3F42F-F4E1-4E47-B597-302A5815DE15}"/>
               </a:ext>
             </a:extLst>
           </p:cNvPr>
@@ -11406,7 +11414,7 @@
           <p:nvPr/>
         </p:nvPicPr>
         <p:blipFill>
-          <a:blip xmlns:r="http://schemas.openxmlformats.org/officeDocument/2006/relationships" xmlns:a="http://schemas.openxmlformats.org/drawingml/2006/main" r:embed="R3b2537ba8bb44243"/>
+          <a:blip xmlns:r="http://schemas.openxmlformats.org/officeDocument/2006/relationships" xmlns:a="http://schemas.openxmlformats.org/drawingml/2006/main" r:embed="R28cfe9ae20614547"/>
           <a:stretch xmlns:a="http://schemas.openxmlformats.org/drawingml/2006/main"/>
         </p:blipFill>
         <p:spPr>
@@ -11424,7 +11432,7 @@
           <p:cNvPr id="11" name="">
             <a:extLst xmlns:a="http://schemas.openxmlformats.org/drawingml/2006/main">
               <a:ext uri="{FF2B5EF4-FFF2-40B4-BE49-F238E27FC236}">
-                <a16:creationId xmlns:a16="http://schemas.microsoft.com/office/drawing/2014/main" id="{618DF35F-B83B-4BE0-A8F9-35AD6F8D7701}"/>
+                <a16:creationId xmlns:a16="http://schemas.microsoft.com/office/drawing/2014/main" id="{BE86D3FA-05A2-493F-94F4-4C55B0944593}"/>
               </a:ext>
             </a:extLst>
           </p:cNvPr>
@@ -11481,7 +11489,7 @@
           <p:cNvPr id="12" name="">
             <a:extLst xmlns:a="http://schemas.openxmlformats.org/drawingml/2006/main">
               <a:ext uri="{FF2B5EF4-FFF2-40B4-BE49-F238E27FC236}">
-                <a16:creationId xmlns:a16="http://schemas.microsoft.com/office/drawing/2014/main" id="{84C10EE6-3C6A-4A1F-A3AD-5BDE2AAED5D2}"/>
+                <a16:creationId xmlns:a16="http://schemas.microsoft.com/office/drawing/2014/main" id="{B03F0822-595C-4508-80F2-A4321EF4606D}"/>
               </a:ext>
             </a:extLst>
           </p:cNvPr>
@@ -11538,7 +11546,7 @@
           <p:cNvPr id="13" name="">
             <a:extLst xmlns:a="http://schemas.openxmlformats.org/drawingml/2006/main">
               <a:ext uri="{FF2B5EF4-FFF2-40B4-BE49-F238E27FC236}">
-                <a16:creationId xmlns:a16="http://schemas.microsoft.com/office/drawing/2014/main" id="{3284F611-E07A-431A-94F7-A536494D6C4A}"/>
+                <a16:creationId xmlns:a16="http://schemas.microsoft.com/office/drawing/2014/main" id="{DBAF1F5F-960F-4F9F-B291-67CFAAE724A0}"/>
               </a:ext>
             </a:extLst>
           </p:cNvPr>
@@ -11570,7 +11578,7 @@
           <p:cNvPr id="14" name="">
             <a:extLst xmlns:a="http://schemas.openxmlformats.org/drawingml/2006/main">
               <a:ext uri="{FF2B5EF4-FFF2-40B4-BE49-F238E27FC236}">
-                <a16:creationId xmlns:a16="http://schemas.microsoft.com/office/drawing/2014/main" id="{84D94207-C633-466D-B38D-958C572A95DB}"/>
+                <a16:creationId xmlns:a16="http://schemas.microsoft.com/office/drawing/2014/main" id="{0FF384BC-95A9-48BA-90F6-8878B1378F92}"/>
               </a:ext>
             </a:extLst>
           </p:cNvPr>
@@ -11627,7 +11635,7 @@
           <p:cNvPr id="15" name="">
             <a:extLst xmlns:a="http://schemas.openxmlformats.org/drawingml/2006/main">
               <a:ext uri="{FF2B5EF4-FFF2-40B4-BE49-F238E27FC236}">
-                <a16:creationId xmlns:a16="http://schemas.microsoft.com/office/drawing/2014/main" id="{F12EE8F7-ACB5-4AEC-A518-6A28EF28692C}"/>
+                <a16:creationId xmlns:a16="http://schemas.microsoft.com/office/drawing/2014/main" id="{158B932F-4181-4AC8-A05F-05A6D6C980AE}"/>
               </a:ext>
             </a:extLst>
           </p:cNvPr>
@@ -11682,7 +11690,7 @@
     </p:spTree>
     <p:extLst>
       <p:ext uri="{BB962C8B-B14F-4D97-AF65-F5344CB8AC3E}">
-        <p14:creationId xmlns:p14="http://schemas.microsoft.com/office/powerpoint/2010/main" val="174671935"/>
+        <p14:creationId xmlns:p14="http://schemas.microsoft.com/office/powerpoint/2010/main" val="1109050526"/>
       </p:ext>
     </p:extLst>
   </p:cSld>
@@ -11837,7 +11845,7 @@
           <p:cNvPr id="23" name="">
             <a:extLst xmlns:a="http://schemas.openxmlformats.org/drawingml/2006/main">
               <a:ext uri="{FF2B5EF4-FFF2-40B4-BE49-F238E27FC236}">
-                <a16:creationId xmlns:a16="http://schemas.microsoft.com/office/drawing/2014/main" id="{26F015DD-46C0-4772-9ECE-AA1B1A3B1D30}"/>
+                <a16:creationId xmlns:a16="http://schemas.microsoft.com/office/drawing/2014/main" id="{B7A5C82D-0D9E-4103-9B5C-283C567AEF73}"/>
               </a:ext>
             </a:extLst>
           </p:cNvPr>
@@ -11869,7 +11877,7 @@
           <p:cNvPr id="2" name="">
             <a:extLst xmlns:a="http://schemas.openxmlformats.org/drawingml/2006/main">
               <a:ext uri="{FF2B5EF4-FFF2-40B4-BE49-F238E27FC236}">
-                <a16:creationId xmlns:a16="http://schemas.microsoft.com/office/drawing/2014/main" id="{E7094B93-A0A0-416B-B1B7-0912BA700E20}"/>
+                <a16:creationId xmlns:a16="http://schemas.microsoft.com/office/drawing/2014/main" id="{ACA3F6B7-AA4A-4A8F-8A7E-F119DAAFB0BF}"/>
               </a:ext>
             </a:extLst>
           </p:cNvPr>
@@ -11926,7 +11934,7 @@
           <p:cNvPr id="3" name="">
             <a:extLst xmlns:a="http://schemas.openxmlformats.org/drawingml/2006/main">
               <a:ext uri="{FF2B5EF4-FFF2-40B4-BE49-F238E27FC236}">
-                <a16:creationId xmlns:a16="http://schemas.microsoft.com/office/drawing/2014/main" id="{FD12DAB0-14C1-4DA2-BB00-CBB4E5B8525A}"/>
+                <a16:creationId xmlns:a16="http://schemas.microsoft.com/office/drawing/2014/main" id="{85BCDAD2-6B9D-4D36-A188-85D867763DD0}"/>
               </a:ext>
             </a:extLst>
           </p:cNvPr>
@@ -11958,7 +11966,7 @@
           <p:cNvPr id="4" name="">
             <a:extLst xmlns:a="http://schemas.openxmlformats.org/drawingml/2006/main">
               <a:ext uri="{FF2B5EF4-FFF2-40B4-BE49-F238E27FC236}">
-                <a16:creationId xmlns:a16="http://schemas.microsoft.com/office/drawing/2014/main" id="{2603AF67-AFF1-457A-B3FC-60FC87B1F179}"/>
+                <a16:creationId xmlns:a16="http://schemas.microsoft.com/office/drawing/2014/main" id="{6A818F59-77CC-46F1-B17E-258E23746A3A}"/>
               </a:ext>
             </a:extLst>
           </p:cNvPr>
@@ -12015,7 +12023,7 @@
           <p:cNvPr id="5" name="">
             <a:extLst xmlns:a="http://schemas.openxmlformats.org/drawingml/2006/main">
               <a:ext uri="{FF2B5EF4-FFF2-40B4-BE49-F238E27FC236}">
-                <a16:creationId xmlns:a16="http://schemas.microsoft.com/office/drawing/2014/main" id="{231E3A5B-8700-4CD0-B443-2EAC4C8C704A}"/>
+                <a16:creationId xmlns:a16="http://schemas.microsoft.com/office/drawing/2014/main" id="{2C417021-30EA-4B72-BC45-857552025A9D}"/>
               </a:ext>
             </a:extLst>
           </p:cNvPr>
@@ -12072,7 +12080,7 @@
           <p:cNvPr id="6" name="">
             <a:extLst xmlns:a="http://schemas.openxmlformats.org/drawingml/2006/main">
               <a:ext uri="{FF2B5EF4-FFF2-40B4-BE49-F238E27FC236}">
-                <a16:creationId xmlns:a16="http://schemas.microsoft.com/office/drawing/2014/main" id="{43A200AC-10B9-43EB-82C9-2F2523B1B23E}"/>
+                <a16:creationId xmlns:a16="http://schemas.microsoft.com/office/drawing/2014/main" id="{9AD5044A-D847-4318-A7EC-2F93618B9192}"/>
               </a:ext>
             </a:extLst>
           </p:cNvPr>
@@ -12129,7 +12137,7 @@
           <p:cNvPr id="7" name="">
             <a:extLst xmlns:a="http://schemas.openxmlformats.org/drawingml/2006/main">
               <a:ext uri="{FF2B5EF4-FFF2-40B4-BE49-F238E27FC236}">
-                <a16:creationId xmlns:a16="http://schemas.microsoft.com/office/drawing/2014/main" id="{1B970B2C-4ED4-4B5E-86F8-E248FF8539E2}"/>
+                <a16:creationId xmlns:a16="http://schemas.microsoft.com/office/drawing/2014/main" id="{9B9FB45D-33C5-4185-AD00-4BB8AFF7C881}"/>
               </a:ext>
             </a:extLst>
           </p:cNvPr>
@@ -12161,7 +12169,7 @@
           <p:cNvPr id="8" name="">
             <a:extLst xmlns:a="http://schemas.openxmlformats.org/drawingml/2006/main">
               <a:ext uri="{FF2B5EF4-FFF2-40B4-BE49-F238E27FC236}">
-                <a16:creationId xmlns:a16="http://schemas.microsoft.com/office/drawing/2014/main" id="{FA5999FA-CEA7-4813-A5AF-C86EB867DA56}"/>
+                <a16:creationId xmlns:a16="http://schemas.microsoft.com/office/drawing/2014/main" id="{DD71DE25-20A5-4F3C-B16D-DE69B646C9A6}"/>
               </a:ext>
             </a:extLst>
           </p:cNvPr>
@@ -12218,7 +12226,7 @@
           <p:cNvPr id="9" name="">
             <a:extLst xmlns:a="http://schemas.openxmlformats.org/drawingml/2006/main">
               <a:ext uri="{FF2B5EF4-FFF2-40B4-BE49-F238E27FC236}">
-                <a16:creationId xmlns:a16="http://schemas.microsoft.com/office/drawing/2014/main" id="{E0049C8D-FDD9-45A7-8AE3-F1FC814637F2}"/>
+                <a16:creationId xmlns:a16="http://schemas.microsoft.com/office/drawing/2014/main" id="{68F53DC8-424A-468B-A6BC-0CC4DE8CB677}"/>
               </a:ext>
             </a:extLst>
           </p:cNvPr>
@@ -12275,7 +12283,7 @@
           <p:cNvPr id="10" name="">
             <a:extLst xmlns:a="http://schemas.openxmlformats.org/drawingml/2006/main">
               <a:ext uri="{FF2B5EF4-FFF2-40B4-BE49-F238E27FC236}">
-                <a16:creationId xmlns:a16="http://schemas.microsoft.com/office/drawing/2014/main" id="{A1C4EFBF-CB24-4A31-BDBD-D0E1E4E34325}"/>
+                <a16:creationId xmlns:a16="http://schemas.microsoft.com/office/drawing/2014/main" id="{BDD95A0B-E9C3-488B-B134-3FA07366252B}"/>
               </a:ext>
             </a:extLst>
           </p:cNvPr>
@@ -12309,7 +12317,7 @@
           <p:cNvPr id="11" name="">
             <a:extLst xmlns:a="http://schemas.openxmlformats.org/drawingml/2006/main">
               <a:ext uri="{FF2B5EF4-FFF2-40B4-BE49-F238E27FC236}">
-                <a16:creationId xmlns:a16="http://schemas.microsoft.com/office/drawing/2014/main" id="{75067744-AB71-4E45-AC6B-E71EAF048190}"/>
+                <a16:creationId xmlns:a16="http://schemas.microsoft.com/office/drawing/2014/main" id="{F9887853-9F1D-48E6-B78B-CA3FD307A57A}"/>
               </a:ext>
             </a:extLst>
           </p:cNvPr>
@@ -12341,7 +12349,7 @@
           <p:cNvPr id="12" name="">
             <a:extLst xmlns:a="http://schemas.openxmlformats.org/drawingml/2006/main">
               <a:ext uri="{FF2B5EF4-FFF2-40B4-BE49-F238E27FC236}">
-                <a16:creationId xmlns:a16="http://schemas.microsoft.com/office/drawing/2014/main" id="{ECEFF21D-06B8-4C89-8D06-5C4243AF7AD9}"/>
+                <a16:creationId xmlns:a16="http://schemas.microsoft.com/office/drawing/2014/main" id="{2AD55FE7-9E38-42DC-A384-BD3598F936E9}"/>
               </a:ext>
             </a:extLst>
           </p:cNvPr>
@@ -12398,7 +12406,7 @@
           <p:cNvPr id="13" name="">
             <a:extLst xmlns:a="http://schemas.openxmlformats.org/drawingml/2006/main">
               <a:ext uri="{FF2B5EF4-FFF2-40B4-BE49-F238E27FC236}">
-                <a16:creationId xmlns:a16="http://schemas.microsoft.com/office/drawing/2014/main" id="{C9B5B03D-4BA4-43F6-AAA8-2F4B3B6C4C86}"/>
+                <a16:creationId xmlns:a16="http://schemas.microsoft.com/office/drawing/2014/main" id="{D6319BEB-B59E-4EB3-B58E-57A435740CFF}"/>
               </a:ext>
             </a:extLst>
           </p:cNvPr>
@@ -12455,7 +12463,7 @@
           <p:cNvPr id="14" name="">
             <a:extLst xmlns:a="http://schemas.openxmlformats.org/drawingml/2006/main">
               <a:ext uri="{FF2B5EF4-FFF2-40B4-BE49-F238E27FC236}">
-                <a16:creationId xmlns:a16="http://schemas.microsoft.com/office/drawing/2014/main" id="{D7BC8A09-B5DF-4C2B-8088-A9DCCC38680F}"/>
+                <a16:creationId xmlns:a16="http://schemas.microsoft.com/office/drawing/2014/main" id="{28D74549-BF5A-4819-AE25-CB0AACDFC44B}"/>
               </a:ext>
             </a:extLst>
           </p:cNvPr>
@@ -12489,7 +12497,7 @@
           <p:cNvPr id="15" name="">
             <a:extLst xmlns:a="http://schemas.openxmlformats.org/drawingml/2006/main">
               <a:ext uri="{FF2B5EF4-FFF2-40B4-BE49-F238E27FC236}">
-                <a16:creationId xmlns:a16="http://schemas.microsoft.com/office/drawing/2014/main" id="{A53AAB6B-486C-494D-9265-A75A950FB5F0}"/>
+                <a16:creationId xmlns:a16="http://schemas.microsoft.com/office/drawing/2014/main" id="{CC24B32B-322F-41DE-AD3B-74F421387CB0}"/>
               </a:ext>
             </a:extLst>
           </p:cNvPr>
@@ -12521,7 +12529,7 @@
           <p:cNvPr id="16" name="">
             <a:extLst xmlns:a="http://schemas.openxmlformats.org/drawingml/2006/main">
               <a:ext uri="{FF2B5EF4-FFF2-40B4-BE49-F238E27FC236}">
-                <a16:creationId xmlns:a16="http://schemas.microsoft.com/office/drawing/2014/main" id="{F6F96BE1-27B7-4435-9BA5-9399419ED3A8}"/>
+                <a16:creationId xmlns:a16="http://schemas.microsoft.com/office/drawing/2014/main" id="{DF1CCE0E-F6A0-411E-B471-E631FBBC375E}"/>
               </a:ext>
             </a:extLst>
           </p:cNvPr>
@@ -12578,7 +12586,7 @@
           <p:cNvPr id="17" name="">
             <a:extLst xmlns:a="http://schemas.openxmlformats.org/drawingml/2006/main">
               <a:ext uri="{FF2B5EF4-FFF2-40B4-BE49-F238E27FC236}">
-                <a16:creationId xmlns:a16="http://schemas.microsoft.com/office/drawing/2014/main" id="{1685823F-549F-4DEA-B631-4BE337E2C757}"/>
+                <a16:creationId xmlns:a16="http://schemas.microsoft.com/office/drawing/2014/main" id="{E16EE027-F9B2-4222-934F-F443A43967E2}"/>
               </a:ext>
             </a:extLst>
           </p:cNvPr>
@@ -12635,7 +12643,7 @@
           <p:cNvPr id="18" name="">
             <a:extLst xmlns:a="http://schemas.openxmlformats.org/drawingml/2006/main">
               <a:ext uri="{FF2B5EF4-FFF2-40B4-BE49-F238E27FC236}">
-                <a16:creationId xmlns:a16="http://schemas.microsoft.com/office/drawing/2014/main" id="{2669E55B-8E33-40EC-A615-926E4D4853C7}"/>
+                <a16:creationId xmlns:a16="http://schemas.microsoft.com/office/drawing/2014/main" id="{A51D92EA-5763-4267-B824-79D7F17C5E7D}"/>
               </a:ext>
             </a:extLst>
           </p:cNvPr>
@@ -12669,7 +12677,7 @@
           <p:cNvPr id="19" name="">
             <a:extLst xmlns:a="http://schemas.openxmlformats.org/drawingml/2006/main">
               <a:ext uri="{FF2B5EF4-FFF2-40B4-BE49-F238E27FC236}">
-                <a16:creationId xmlns:a16="http://schemas.microsoft.com/office/drawing/2014/main" id="{81738323-51B6-4075-B7AA-EC3D85AA5C6B}"/>
+                <a16:creationId xmlns:a16="http://schemas.microsoft.com/office/drawing/2014/main" id="{0B9A982D-B67F-44E6-80B6-B750DDBDA09F}"/>
               </a:ext>
             </a:extLst>
           </p:cNvPr>
@@ -12701,7 +12709,7 @@
           <p:cNvPr id="20" name="">
             <a:extLst xmlns:a="http://schemas.openxmlformats.org/drawingml/2006/main">
               <a:ext uri="{FF2B5EF4-FFF2-40B4-BE49-F238E27FC236}">
-                <a16:creationId xmlns:a16="http://schemas.microsoft.com/office/drawing/2014/main" id="{7079ED5A-86CC-498E-85BD-575ADEA36D0F}"/>
+                <a16:creationId xmlns:a16="http://schemas.microsoft.com/office/drawing/2014/main" id="{A9AB58DA-6792-44DF-A5C0-B111AA5ADE24}"/>
               </a:ext>
             </a:extLst>
           </p:cNvPr>
@@ -12758,7 +12766,7 @@
           <p:cNvPr id="21" name="">
             <a:extLst xmlns:a="http://schemas.openxmlformats.org/drawingml/2006/main">
               <a:ext uri="{FF2B5EF4-FFF2-40B4-BE49-F238E27FC236}">
-                <a16:creationId xmlns:a16="http://schemas.microsoft.com/office/drawing/2014/main" id="{0BE03BBA-598B-4F81-A4E9-578FEAC7F963}"/>
+                <a16:creationId xmlns:a16="http://schemas.microsoft.com/office/drawing/2014/main" id="{CA8E4D9D-E926-43C0-B829-4284BD6AB7A0}"/>
               </a:ext>
             </a:extLst>
           </p:cNvPr>
@@ -12815,7 +12823,7 @@
           <p:cNvPr id="22" name="">
             <a:extLst xmlns:a="http://schemas.openxmlformats.org/drawingml/2006/main">
               <a:ext uri="{FF2B5EF4-FFF2-40B4-BE49-F238E27FC236}">
-                <a16:creationId xmlns:a16="http://schemas.microsoft.com/office/drawing/2014/main" id="{66CBCA75-B5AE-48C7-9427-520F92245E00}"/>
+                <a16:creationId xmlns:a16="http://schemas.microsoft.com/office/drawing/2014/main" id="{6F457462-1FB7-412E-A97C-A8F10D25B233}"/>
               </a:ext>
             </a:extLst>
           </p:cNvPr>
@@ -12870,7 +12878,7 @@
     </p:spTree>
     <p:extLst>
       <p:ext uri="{BB962C8B-B14F-4D97-AF65-F5344CB8AC3E}">
-        <p14:creationId xmlns:p14="http://schemas.microsoft.com/office/powerpoint/2010/main" val="554896173"/>
+        <p14:creationId xmlns:p14="http://schemas.microsoft.com/office/powerpoint/2010/main" val="792722828"/>
       </p:ext>
     </p:extLst>
   </p:cSld>
@@ -13071,7 +13079,7 @@
           <p:cNvPr id="22" name="">
             <a:extLst xmlns:a="http://schemas.openxmlformats.org/drawingml/2006/main">
               <a:ext uri="{FF2B5EF4-FFF2-40B4-BE49-F238E27FC236}">
-                <a16:creationId xmlns:a16="http://schemas.microsoft.com/office/drawing/2014/main" id="{BCCDDFE6-D569-4CCA-8E42-6794CA510DB3}"/>
+                <a16:creationId xmlns:a16="http://schemas.microsoft.com/office/drawing/2014/main" id="{53D006ED-68E8-48A4-9152-6049E2A2EDC2}"/>
               </a:ext>
             </a:extLst>
           </p:cNvPr>
@@ -13103,7 +13111,7 @@
           <p:cNvPr id="2" name="">
             <a:extLst xmlns:a="http://schemas.openxmlformats.org/drawingml/2006/main">
               <a:ext uri="{FF2B5EF4-FFF2-40B4-BE49-F238E27FC236}">
-                <a16:creationId xmlns:a16="http://schemas.microsoft.com/office/drawing/2014/main" id="{47C62C51-D0D2-4325-BC07-38F145A01E08}"/>
+                <a16:creationId xmlns:a16="http://schemas.microsoft.com/office/drawing/2014/main" id="{3B1472C4-6C14-493F-BF7B-F4814F19D3F4}"/>
               </a:ext>
             </a:extLst>
           </p:cNvPr>
@@ -13160,7 +13168,7 @@
           <p:cNvPr id="3" name="">
             <a:extLst xmlns:a="http://schemas.openxmlformats.org/drawingml/2006/main">
               <a:ext uri="{FF2B5EF4-FFF2-40B4-BE49-F238E27FC236}">
-                <a16:creationId xmlns:a16="http://schemas.microsoft.com/office/drawing/2014/main" id="{66BB223B-AC37-4184-A623-CE61040F0ED1}"/>
+                <a16:creationId xmlns:a16="http://schemas.microsoft.com/office/drawing/2014/main" id="{1872C817-2698-48E9-B788-580FB9886F7A}"/>
               </a:ext>
             </a:extLst>
           </p:cNvPr>
@@ -13192,7 +13200,7 @@
           <p:cNvPr id="4" name="">
             <a:extLst xmlns:a="http://schemas.openxmlformats.org/drawingml/2006/main">
               <a:ext uri="{FF2B5EF4-FFF2-40B4-BE49-F238E27FC236}">
-                <a16:creationId xmlns:a16="http://schemas.microsoft.com/office/drawing/2014/main" id="{E1743FFA-353C-4DF7-91C7-3748DC79E242}"/>
+                <a16:creationId xmlns:a16="http://schemas.microsoft.com/office/drawing/2014/main" id="{DFB7E45C-751B-4026-A691-D808C22CD784}"/>
               </a:ext>
             </a:extLst>
           </p:cNvPr>
@@ -13249,7 +13257,7 @@
           <p:cNvPr id="5" name="">
             <a:extLst xmlns:a="http://schemas.openxmlformats.org/drawingml/2006/main">
               <a:ext uri="{FF2B5EF4-FFF2-40B4-BE49-F238E27FC236}">
-                <a16:creationId xmlns:a16="http://schemas.microsoft.com/office/drawing/2014/main" id="{D141FAD0-9C3D-4427-989D-BA41ED21E7F7}"/>
+                <a16:creationId xmlns:a16="http://schemas.microsoft.com/office/drawing/2014/main" id="{90CF66AA-ADFA-4481-B25A-85DE63373D60}"/>
               </a:ext>
             </a:extLst>
           </p:cNvPr>
@@ -13306,7 +13314,7 @@
           <p:cNvPr id="6" name="">
             <a:extLst xmlns:a="http://schemas.openxmlformats.org/drawingml/2006/main">
               <a:ext uri="{FF2B5EF4-FFF2-40B4-BE49-F238E27FC236}">
-                <a16:creationId xmlns:a16="http://schemas.microsoft.com/office/drawing/2014/main" id="{FDD6A8C4-CE53-48B7-80CA-17CB43BC2F66}"/>
+                <a16:creationId xmlns:a16="http://schemas.microsoft.com/office/drawing/2014/main" id="{5D50289C-C4D2-4B0F-9921-E2F1A28A5BDE}"/>
               </a:ext>
             </a:extLst>
           </p:cNvPr>
@@ -13363,7 +13371,7 @@
           <p:cNvPr id="7" name="">
             <a:extLst xmlns:a="http://schemas.openxmlformats.org/drawingml/2006/main">
               <a:ext uri="{FF2B5EF4-FFF2-40B4-BE49-F238E27FC236}">
-                <a16:creationId xmlns:a16="http://schemas.microsoft.com/office/drawing/2014/main" id="{BA72103F-2061-487B-A796-808A27999DBC}"/>
+                <a16:creationId xmlns:a16="http://schemas.microsoft.com/office/drawing/2014/main" id="{52A3A056-BD6C-49E8-A90F-F673EF0ADB79}"/>
               </a:ext>
             </a:extLst>
           </p:cNvPr>
@@ -13395,7 +13403,7 @@
           <p:cNvPr id="8" name="">
             <a:extLst xmlns:a="http://schemas.openxmlformats.org/drawingml/2006/main">
               <a:ext uri="{FF2B5EF4-FFF2-40B4-BE49-F238E27FC236}">
-                <a16:creationId xmlns:a16="http://schemas.microsoft.com/office/drawing/2014/main" id="{556FC87A-10C1-46F0-8A63-D0C7EFE13C10}"/>
+                <a16:creationId xmlns:a16="http://schemas.microsoft.com/office/drawing/2014/main" id="{FE440AE2-4B53-4E92-867F-D4160605737C}"/>
               </a:ext>
             </a:extLst>
           </p:cNvPr>
@@ -13452,7 +13460,7 @@
           <p:cNvPr id="9" name="">
             <a:extLst xmlns:a="http://schemas.openxmlformats.org/drawingml/2006/main">
               <a:ext uri="{FF2B5EF4-FFF2-40B4-BE49-F238E27FC236}">
-                <a16:creationId xmlns:a16="http://schemas.microsoft.com/office/drawing/2014/main" id="{13F45793-5C23-492C-ACE3-C9CF30A42F5D}"/>
+                <a16:creationId xmlns:a16="http://schemas.microsoft.com/office/drawing/2014/main" id="{39FBBE57-A95F-449C-8AAC-4662B890930F}"/>
               </a:ext>
             </a:extLst>
           </p:cNvPr>
@@ -13509,7 +13517,7 @@
           <p:cNvPr id="10" name="">
             <a:extLst xmlns:a="http://schemas.openxmlformats.org/drawingml/2006/main">
               <a:ext uri="{FF2B5EF4-FFF2-40B4-BE49-F238E27FC236}">
-                <a16:creationId xmlns:a16="http://schemas.microsoft.com/office/drawing/2014/main" id="{44C7CDA8-6D5E-4FEC-8A36-57B837EA03AB}"/>
+                <a16:creationId xmlns:a16="http://schemas.microsoft.com/office/drawing/2014/main" id="{D5F76B1A-CB47-4F8C-B209-5BA03E010676}"/>
               </a:ext>
             </a:extLst>
           </p:cNvPr>
@@ -13543,7 +13551,7 @@
           <p:cNvPr id="11" name="">
             <a:extLst xmlns:a="http://schemas.openxmlformats.org/drawingml/2006/main">
               <a:ext uri="{FF2B5EF4-FFF2-40B4-BE49-F238E27FC236}">
-                <a16:creationId xmlns:a16="http://schemas.microsoft.com/office/drawing/2014/main" id="{77357316-B91A-4BF0-AF02-6417CE1CB0A2}"/>
+                <a16:creationId xmlns:a16="http://schemas.microsoft.com/office/drawing/2014/main" id="{D3233DCC-DB87-45D1-8781-BE2C7C889A79}"/>
               </a:ext>
             </a:extLst>
           </p:cNvPr>
@@ -13575,7 +13583,7 @@
           <p:cNvPr id="12" name="">
             <a:extLst xmlns:a="http://schemas.openxmlformats.org/drawingml/2006/main">
               <a:ext uri="{FF2B5EF4-FFF2-40B4-BE49-F238E27FC236}">
-                <a16:creationId xmlns:a16="http://schemas.microsoft.com/office/drawing/2014/main" id="{581CB4B3-FAB9-4380-8535-14FFED27EEFD}"/>
+                <a16:creationId xmlns:a16="http://schemas.microsoft.com/office/drawing/2014/main" id="{B68278EC-E9A4-4240-8D9A-B4CE03EDB762}"/>
               </a:ext>
             </a:extLst>
           </p:cNvPr>
@@ -13632,7 +13640,7 @@
           <p:cNvPr id="13" name="">
             <a:extLst xmlns:a="http://schemas.openxmlformats.org/drawingml/2006/main">
               <a:ext uri="{FF2B5EF4-FFF2-40B4-BE49-F238E27FC236}">
-                <a16:creationId xmlns:a16="http://schemas.microsoft.com/office/drawing/2014/main" id="{EF01791D-9293-4858-9052-718F1AADE25E}"/>
+                <a16:creationId xmlns:a16="http://schemas.microsoft.com/office/drawing/2014/main" id="{15ACCEDC-BB8D-46BE-8E5C-DF2DC5713F39}"/>
               </a:ext>
             </a:extLst>
           </p:cNvPr>
@@ -13689,7 +13697,7 @@
           <p:cNvPr id="14" name="">
             <a:extLst xmlns:a="http://schemas.openxmlformats.org/drawingml/2006/main">
               <a:ext uri="{FF2B5EF4-FFF2-40B4-BE49-F238E27FC236}">
-                <a16:creationId xmlns:a16="http://schemas.microsoft.com/office/drawing/2014/main" id="{01186B7B-CB89-4D57-A564-B6C603DEB121}"/>
+                <a16:creationId xmlns:a16="http://schemas.microsoft.com/office/drawing/2014/main" id="{0499E729-E119-411D-B9BD-0411D6739280}"/>
               </a:ext>
             </a:extLst>
           </p:cNvPr>
@@ -13723,7 +13731,7 @@
           <p:cNvPr id="15" name="">
             <a:extLst xmlns:a="http://schemas.openxmlformats.org/drawingml/2006/main">
               <a:ext uri="{FF2B5EF4-FFF2-40B4-BE49-F238E27FC236}">
-                <a16:creationId xmlns:a16="http://schemas.microsoft.com/office/drawing/2014/main" id="{71C54EF4-C92D-487E-9235-095ACACB9010}"/>
+                <a16:creationId xmlns:a16="http://schemas.microsoft.com/office/drawing/2014/main" id="{884E975B-15E3-4649-AF72-6B411849B898}"/>
               </a:ext>
             </a:extLst>
           </p:cNvPr>
@@ -13755,7 +13763,7 @@
           <p:cNvPr id="16" name="">
             <a:extLst xmlns:a="http://schemas.openxmlformats.org/drawingml/2006/main">
               <a:ext uri="{FF2B5EF4-FFF2-40B4-BE49-F238E27FC236}">
-                <a16:creationId xmlns:a16="http://schemas.microsoft.com/office/drawing/2014/main" id="{FCCBC3BC-1BCA-44EF-B70B-43E826BEA3A0}"/>
+                <a16:creationId xmlns:a16="http://schemas.microsoft.com/office/drawing/2014/main" id="{FF851512-E90A-468A-86ED-2647C38DA881}"/>
               </a:ext>
             </a:extLst>
           </p:cNvPr>
@@ -13812,7 +13820,7 @@
           <p:cNvPr id="17" name="">
             <a:extLst xmlns:a="http://schemas.openxmlformats.org/drawingml/2006/main">
               <a:ext uri="{FF2B5EF4-FFF2-40B4-BE49-F238E27FC236}">
-                <a16:creationId xmlns:a16="http://schemas.microsoft.com/office/drawing/2014/main" id="{6DCE764F-4761-4A91-B38E-9489FEA824EB}"/>
+                <a16:creationId xmlns:a16="http://schemas.microsoft.com/office/drawing/2014/main" id="{5FC4FC79-93EC-44E4-9AA7-C3D81A84BA42}"/>
               </a:ext>
             </a:extLst>
           </p:cNvPr>
@@ -13869,7 +13877,7 @@
           <p:cNvPr id="18" name="">
             <a:extLst xmlns:a="http://schemas.openxmlformats.org/drawingml/2006/main">
               <a:ext uri="{FF2B5EF4-FFF2-40B4-BE49-F238E27FC236}">
-                <a16:creationId xmlns:a16="http://schemas.microsoft.com/office/drawing/2014/main" id="{BA3865A3-2118-44E5-9BCC-DF5DA6E89B18}"/>
+                <a16:creationId xmlns:a16="http://schemas.microsoft.com/office/drawing/2014/main" id="{191A35C7-15FE-4040-A70D-234DD5339741}"/>
               </a:ext>
             </a:extLst>
           </p:cNvPr>
@@ -13903,7 +13911,7 @@
           <p:cNvPr id="19" name="">
             <a:extLst xmlns:a="http://schemas.openxmlformats.org/drawingml/2006/main">
               <a:ext uri="{FF2B5EF4-FFF2-40B4-BE49-F238E27FC236}">
-                <a16:creationId xmlns:a16="http://schemas.microsoft.com/office/drawing/2014/main" id="{F32D2E91-AA8F-47C6-BFB6-DB477F5E742A}"/>
+                <a16:creationId xmlns:a16="http://schemas.microsoft.com/office/drawing/2014/main" id="{F1B2D59E-2867-49FF-BB84-1EE3AC7BE2A8}"/>
               </a:ext>
             </a:extLst>
           </p:cNvPr>
@@ -13935,7 +13943,7 @@
           <p:cNvPr id="20" name="">
             <a:extLst xmlns:a="http://schemas.openxmlformats.org/drawingml/2006/main">
               <a:ext uri="{FF2B5EF4-FFF2-40B4-BE49-F238E27FC236}">
-                <a16:creationId xmlns:a16="http://schemas.microsoft.com/office/drawing/2014/main" id="{8ACA38FA-8010-4335-9331-3F31CFFEB1AA}"/>
+                <a16:creationId xmlns:a16="http://schemas.microsoft.com/office/drawing/2014/main" id="{8B64C9F5-ACB2-4CA3-88DD-45A9713551DE}"/>
               </a:ext>
             </a:extLst>
           </p:cNvPr>
@@ -13992,7 +14000,7 @@
           <p:cNvPr id="21" name="">
             <a:extLst xmlns:a="http://schemas.openxmlformats.org/drawingml/2006/main">
               <a:ext uri="{FF2B5EF4-FFF2-40B4-BE49-F238E27FC236}">
-                <a16:creationId xmlns:a16="http://schemas.microsoft.com/office/drawing/2014/main" id="{C0BD66E5-0E9C-429E-946A-710A03274B6C}"/>
+                <a16:creationId xmlns:a16="http://schemas.microsoft.com/office/drawing/2014/main" id="{2FC1E81C-CA0C-46B6-B92E-BE03E2F0C822}"/>
               </a:ext>
             </a:extLst>
           </p:cNvPr>
@@ -14047,7 +14055,7 @@
     </p:spTree>
     <p:extLst>
       <p:ext uri="{BB962C8B-B14F-4D97-AF65-F5344CB8AC3E}">
-        <p14:creationId xmlns:p14="http://schemas.microsoft.com/office/powerpoint/2010/main" val="623814428"/>
+        <p14:creationId xmlns:p14="http://schemas.microsoft.com/office/powerpoint/2010/main" val="1395648891"/>
       </p:ext>
     </p:extLst>
   </p:cSld>
